--- a/docs/Visitor-Counting-Console-Deck.pptx
+++ b/docs/Visitor-Counting-Console-Deck.pptx
@@ -22,6 +22,19 @@
     <p:sldId id="270" r:id="rId16"/>
     <p:sldId id="271" r:id="rId17"/>
     <p:sldId id="272" r:id="rId18"/>
+    <p:sldId id="273" r:id="rId19"/>
+    <p:sldId id="274" r:id="rId20"/>
+    <p:sldId id="275" r:id="rId21"/>
+    <p:sldId id="276" r:id="rId22"/>
+    <p:sldId id="277" r:id="rId23"/>
+    <p:sldId id="278" r:id="rId24"/>
+    <p:sldId id="279" r:id="rId25"/>
+    <p:sldId id="280" r:id="rId26"/>
+    <p:sldId id="281" r:id="rId27"/>
+    <p:sldId id="282" r:id="rId28"/>
+    <p:sldId id="283" r:id="rId29"/>
+    <p:sldId id="284" r:id="rId30"/>
+    <p:sldId id="285" r:id="rId31"/>
   </p:sldIdLst>
   <p:sldSz cx="9144000" cy="5143500" type="screen16x9"/>
   <p:notesSz cx="6858000" cy="9144000"/>
@@ -3215,12 +3228,12 @@
       </p:grpSpPr>
       <p:sp>
         <p:nvSpPr>
-          <p:cNvPr id="2" name="Title 1"/>
-          <p:cNvSpPr>
-            <a:spLocks noGrp="1"/>
-          </p:cNvSpPr>
-          <p:nvPr>
-            <p:ph type="title"/>
+          <p:cNvPr id="3" name="Content Placeholder 2"/>
+          <p:cNvSpPr>
+            <a:spLocks noGrp="1"/>
+          </p:cNvSpPr>
+          <p:nvPr>
+            <p:ph idx="1"/>
           </p:nvPr>
         </p:nvSpPr>
         <p:spPr/>
@@ -3233,98 +3246,15 @@
             </a:pPr>
             <a:r>
               <a:rPr/>
-              <a:t>Cameras</a:t>
-            </a:r>
-          </a:p>
-        </p:txBody>
-      </p:sp>
-      <p:sp>
-        <p:nvSpPr>
-          <p:cNvPr id="3" name="Content Placeholder 2"/>
-          <p:cNvSpPr>
-            <a:spLocks noGrp="1"/>
-          </p:cNvSpPr>
-          <p:nvPr>
-            <p:ph idx="1"/>
-          </p:nvPr>
-        </p:nvSpPr>
-        <p:spPr/>
-        <p:txBody>
-          <a:bodyPr/>
-          <a:lstStyle/>
-          <a:p>
-            <a:pPr lvl="0"/>
-            <a:r>
-              <a:rPr/>
-              <a:t>Up to </a:t>
+              <a:t>The dashed extension past each end is the </a:t>
             </a:r>
             <a:r>
               <a:rPr b="1"/>
-              <a:t>six</a:t>
-            </a:r>
-            <a:r>
-              <a:rPr/>
-              <a:t>, added and removed while running; the grid re-lays itself out</a:t>
-            </a:r>
-          </a:p>
-          <a:p>
-            <a:pPr lvl="0"/>
-            <a:r>
-              <a:rPr/>
-              <a:t>RTSP, HTTP or a video file per camera</a:t>
-            </a:r>
-          </a:p>
-          <a:p>
-            <a:pPr lvl="0"/>
-            <a:r>
-              <a:rPr/>
-              <a:t>Passwords with </a:t>
-            </a:r>
-            <a:r>
-              <a:rPr>
-                <a:latin typeface="Courier"/>
-              </a:rPr>
-              <a:t>@ : $ % &amp;</a:t>
-            </a:r>
-            <a:r>
-              <a:rPr/>
-              <a:t> or spaces are encoded automatically</a:t>
-            </a:r>
-          </a:p>
-          <a:p>
-            <a:pPr lvl="0"/>
-            <a:r>
-              <a:rPr b="1"/>
-              <a:t>Paired feeds</a:t>
-            </a:r>
-            <a:r>
-              <a:rPr/>
-              <a:t>: one key swaps a panel between its live camera and a saved clip</a:t>
-            </a:r>
-          </a:p>
-          <a:p>
-            <a:pPr lvl="0"/>
-            <a:r>
-              <a:rPr/>
-              <a:t>An unreachable camera reports </a:t>
-            </a:r>
-            <a:r>
-              <a:rPr>
-                <a:latin typeface="Courier"/>
-              </a:rPr>
-              <a:t>OFFLINE</a:t>
-            </a:r>
-            <a:r>
-              <a:rPr/>
-              <a:t> and </a:t>
-            </a:r>
-            <a:r>
-              <a:rPr b="1"/>
-              <a:t>hides its figures</a:t>
-            </a:r>
-            <a:r>
-              <a:rPr/>
-              <a:t> rather than showing frozen ones</a:t>
+              <a:t>8 % that still counts</a:t>
+            </a:r>
+            <a:r>
+              <a:rPr/>
+              <a:t>. It is drawn, because an invisible tolerance is indistinguishable from a bug when the numbers look wrong. A line saved within 4 % of the frame edge warns.</a:t>
             </a:r>
           </a:p>
         </p:txBody>
@@ -3361,7 +3291,12 @@
             <p:ph type="title"/>
           </p:nvPr>
         </p:nvSpPr>
-        <p:spPr/>
+        <p:spPr>
+          <a:xfrm>
+            <a:off x="457201" y="204787"/>
+            <a:ext cx="3008313" cy="871538"/>
+          </a:xfrm>
+        </p:spPr>
         <p:txBody>
           <a:bodyPr/>
           <a:lstStyle/>
@@ -3371,70 +3306,231 @@
             </a:pPr>
             <a:r>
               <a:rPr/>
-              <a:t>Capacity, alerts, evidence</a:t>
-            </a:r>
-          </a:p>
-        </p:txBody>
-      </p:sp>
-      <p:sp>
-        <p:nvSpPr>
-          <p:cNvPr id="3" name="Content Placeholder 2"/>
-          <p:cNvSpPr>
-            <a:spLocks noGrp="1"/>
-          </p:cNvSpPr>
+              <a:t>Demographics: two attributes, two strategies</a:t>
+            </a:r>
+          </a:p>
+        </p:txBody>
+      </p:sp>
+      <p:sp>
+        <p:nvSpPr>
+          <p:cNvPr id="4" name="Text Placeholder 3"/>
+          <p:cNvSpPr>
+            <a:spLocks noGrp="1"/>
+          </p:cNvSpPr>
+          <p:nvPr>
+            <p:ph idx="2" sz="half" type="body"/>
+          </p:nvPr>
+        </p:nvSpPr>
+        <p:spPr/>
+        <p:txBody>
+          <a:bodyPr/>
+          <a:lstStyle/>
+          <a:p>
+            <a:pPr lvl="0"/>
+            <a:r>
+              <a:rPr b="1"/>
+              <a:t>Gender</a:t>
+            </a:r>
+            <a:r>
+              <a:rPr/>
+              <a:t> — the last three looks plus one at the moment of crossing, counted double. The read swings early in a track and settles at the line.</a:t>
+            </a:r>
+          </a:p>
+          <a:p>
+            <a:pPr lvl="0"/>
+            <a:r>
+              <a:rPr b="1"/>
+              <a:t>Age</a:t>
+            </a:r>
+            <a:r>
+              <a:rPr/>
+              <a:t> — averages every observation. “Child” is noisy per frame and smooths out.</a:t>
+            </a:r>
+          </a:p>
+          <a:p>
+            <a:pPr lvl="0" indent="0" marL="0">
+              <a:buNone/>
+            </a:pPr>
+            <a:r>
+              <a:rPr/>
+              <a:t>Measured on 56 hand-labelled crossings:</a:t>
+            </a:r>
+          </a:p>
+        </p:txBody>
+      </p:sp>
+      <p:graphicFrame>
+        <p:nvGraphicFramePr>
+          <p:cNvPr id="6" name="Content Placeholder 5"/>
+          <p:cNvGraphicFramePr>
+            <a:graphicFrameLocks noGrp="1"/>
+          </p:cNvGraphicFramePr>
           <p:nvPr>
             <p:ph idx="1"/>
           </p:nvPr>
-        </p:nvSpPr>
-        <p:spPr/>
-        <p:txBody>
-          <a:bodyPr/>
-          <a:lstStyle/>
-          <a:p>
-            <a:pPr lvl="0"/>
-            <a:r>
-              <a:rPr/>
-              <a:t>Site capacity with a warning threshold; the banner </a:t>
-            </a:r>
-            <a:r>
-              <a:rPr b="1"/>
-              <a:t>names the entrance</a:t>
-            </a:r>
-            <a:r>
-              <a:rPr/>
-              <a:t> that tipped the count</a:t>
-            </a:r>
-          </a:p>
-          <a:p>
-            <a:pPr lvl="0"/>
-            <a:r>
-              <a:rPr/>
-              <a:t>Per-area capacity, alarming independently</a:t>
-            </a:r>
-          </a:p>
-          <a:p>
-            <a:pPr lvl="0"/>
-            <a:r>
-              <a:rPr/>
-              <a:t>One button records 10 s before and 20 s after, with a note</a:t>
-            </a:r>
-          </a:p>
-          <a:p>
-            <a:pPr lvl="0"/>
-            <a:r>
-              <a:rPr/>
-              <a:t>Over capacity records a clip automatically</a:t>
-            </a:r>
-          </a:p>
-          <a:p>
-            <a:pPr lvl="0"/>
-            <a:r>
-              <a:rPr/>
-              <a:t>Every crossing is logged with the probabilities behind the decision</a:t>
-            </a:r>
-          </a:p>
-        </p:txBody>
-      </p:sp>
+        </p:nvGraphicFramePr>
+        <p:xfrm>
+          <a:off x="3568700" y="203200"/>
+          <a:ext cx="5105400" cy="4381500"/>
+        </p:xfrm>
+        <a:graphic>
+          <a:graphicData uri="http://schemas.openxmlformats.org/drawingml/2006/table">
+            <a:tbl>
+              <a:tblPr firstRow="1" bandRow="1">
+                <a:tableStyleId>{5C22544A-7EE6-4342-B048-85BDC9FD1C3A}</a:tableStyleId>
+              </a:tblPr>
+              <a:tblGrid>
+                <a:gridCol w="1701800"/>
+                <a:gridCol w="1701800"/>
+                <a:gridCol w="1701800"/>
+              </a:tblGrid>
+              <a:tr h="0">
+                <a:tc>
+                  <a:txBody>
+                    <a:bodyPr/>
+                    <a:lstStyle/>
+                    <a:p>
+                      <a:pPr lvl="0" indent="0" marL="0">
+                        <a:buNone/>
+                      </a:pPr>
+                      <a:r>
+                        <a:rPr/>
+                        <a:t>attribute</a:t>
+                      </a:r>
+                    </a:p>
+                  </a:txBody>
+                  <a:tcPr/>
+                </a:tc>
+                <a:tc>
+                  <a:txBody>
+                    <a:bodyPr/>
+                    <a:lstStyle/>
+                    <a:p>
+                      <a:pPr lvl="0" indent="0" marL="0">
+                        <a:buNone/>
+                      </a:pPr>
+                      <a:r>
+                        <a:rPr/>
+                        <a:t>averaging everything</a:t>
+                      </a:r>
+                    </a:p>
+                  </a:txBody>
+                  <a:tcPr/>
+                </a:tc>
+                <a:tc>
+                  <a:txBody>
+                    <a:bodyPr/>
+                    <a:lstStyle/>
+                    <a:p>
+                      <a:pPr lvl="0" indent="0" marL="0">
+                        <a:buNone/>
+                      </a:pPr>
+                      <a:r>
+                        <a:rPr/>
+                        <a:t>split strategy</a:t>
+                      </a:r>
+                    </a:p>
+                  </a:txBody>
+                  <a:tcPr/>
+                </a:tc>
+              </a:tr>
+              <a:tr h="0">
+                <a:tc>
+                  <a:txBody>
+                    <a:bodyPr/>
+                    <a:lstStyle/>
+                    <a:p>
+                      <a:pPr lvl="0" indent="0" marL="0">
+                        <a:buNone/>
+                      </a:pPr>
+                      <a:r>
+                        <a:rPr/>
+                        <a:t>gender</a:t>
+                      </a:r>
+                    </a:p>
+                  </a:txBody>
+                </a:tc>
+                <a:tc>
+                  <a:txBody>
+                    <a:bodyPr/>
+                    <a:lstStyle/>
+                    <a:p>
+                      <a:pPr lvl="0" indent="0" marL="0">
+                        <a:buNone/>
+                      </a:pPr>
+                      <a:r>
+                        <a:rPr/>
+                        <a:t>90.9 %</a:t>
+                      </a:r>
+                    </a:p>
+                  </a:txBody>
+                </a:tc>
+                <a:tc>
+                  <a:txBody>
+                    <a:bodyPr/>
+                    <a:lstStyle/>
+                    <a:p>
+                      <a:pPr lvl="0" indent="0" marL="0">
+                        <a:buNone/>
+                      </a:pPr>
+                      <a:r>
+                        <a:rPr b="1"/>
+                        <a:t>94.5 %</a:t>
+                      </a:r>
+                    </a:p>
+                  </a:txBody>
+                </a:tc>
+              </a:tr>
+              <a:tr h="0">
+                <a:tc>
+                  <a:txBody>
+                    <a:bodyPr/>
+                    <a:lstStyle/>
+                    <a:p>
+                      <a:pPr lvl="0" indent="0" marL="0">
+                        <a:buNone/>
+                      </a:pPr>
+                      <a:r>
+                        <a:rPr/>
+                        <a:t>adult / child</a:t>
+                      </a:r>
+                    </a:p>
+                  </a:txBody>
+                </a:tc>
+                <a:tc>
+                  <a:txBody>
+                    <a:bodyPr/>
+                    <a:lstStyle/>
+                    <a:p>
+                      <a:pPr lvl="0" indent="0" marL="0">
+                        <a:buNone/>
+                      </a:pPr>
+                      <a:r>
+                        <a:rPr/>
+                        <a:t>96.4 %</a:t>
+                      </a:r>
+                    </a:p>
+                  </a:txBody>
+                </a:tc>
+                <a:tc>
+                  <a:txBody>
+                    <a:bodyPr/>
+                    <a:lstStyle/>
+                    <a:p>
+                      <a:pPr lvl="0" indent="0" marL="0">
+                        <a:buNone/>
+                      </a:pPr>
+                      <a:r>
+                        <a:rPr b="1"/>
+                        <a:t>100 %</a:t>
+                      </a:r>
+                    </a:p>
+                  </a:txBody>
+                </a:tc>
+              </a:tr>
+            </a:tbl>
+          </a:graphicData>
+        </a:graphic>
+      </p:graphicFrame>
     </p:spTree>
   </p:cSld>
 </p:sld>
@@ -3459,12 +3555,12 @@
       </p:grpSpPr>
       <p:sp>
         <p:nvSpPr>
-          <p:cNvPr id="2" name="Title 1"/>
-          <p:cNvSpPr>
-            <a:spLocks noGrp="1"/>
-          </p:cNvSpPr>
-          <p:nvPr>
-            <p:ph type="title"/>
+          <p:cNvPr id="3" name="Content Placeholder 2"/>
+          <p:cNvSpPr>
+            <a:spLocks noGrp="1"/>
+          </p:cNvSpPr>
+          <p:nvPr>
+            <p:ph idx="1"/>
           </p:nvPr>
         </p:nvSpPr>
         <p:spPr/>
@@ -3477,82 +3573,15 @@
             </a:pPr>
             <a:r>
               <a:rPr/>
-              <a:t>Interfaces</a:t>
-            </a:r>
-          </a:p>
-        </p:txBody>
-      </p:sp>
-      <p:sp>
-        <p:nvSpPr>
-          <p:cNvPr id="3" name="Content Placeholder 2"/>
-          <p:cNvSpPr>
-            <a:spLocks noGrp="1"/>
-          </p:cNvSpPr>
-          <p:nvPr>
-            <p:ph idx="1"/>
-          </p:nvPr>
-        </p:nvSpPr>
-        <p:spPr/>
-        <p:txBody>
-          <a:bodyPr/>
-          <a:lstStyle/>
-          <a:p>
-            <a:pPr lvl="0"/>
+              <a:t>Undecided people are reported as </a:t>
+            </a:r>
             <a:r>
               <a:rPr b="1"/>
-              <a:t>24 HTTP and WebSocket endpoints</a:t>
-            </a:r>
-            <a:r>
-              <a:rPr/>
-              <a:t> — state, history, cameras, lines, areas, capacity, recording</a:t>
-            </a:r>
-          </a:p>
-          <a:p>
-            <a:pPr lvl="0"/>
-            <a:r>
-              <a:rPr b="1"/>
-              <a:t>MJPEG</a:t>
-            </a:r>
-            <a:r>
-              <a:rPr/>
-              <a:t> overlay stream per camera, encoded once and shared between viewers</a:t>
-            </a:r>
-          </a:p>
-          <a:p>
-            <a:pPr lvl="0"/>
-            <a:r>
-              <a:rPr b="1"/>
-              <a:t>JSON state</a:t>
-            </a:r>
-            <a:r>
-              <a:rPr/>
-              <a:t> pushed over WebSocket at about 4 Hz</a:t>
-            </a:r>
-          </a:p>
-          <a:p>
-            <a:pPr lvl="0"/>
-            <a:r>
-              <a:rPr>
-                <a:latin typeface="Courier"/>
-              </a:rPr>
-              <a:t>output/events.csv</a:t>
-            </a:r>
-            <a:r>
-              <a:rPr/>
-              <a:t> — one row per crossing</a:t>
-            </a:r>
-          </a:p>
-          <a:p>
-            <a:pPr lvl="0"/>
-            <a:r>
-              <a:rPr>
-                <a:latin typeface="Courier"/>
-              </a:rPr>
-              <a:t>output/history.csv</a:t>
-            </a:r>
-            <a:r>
-              <a:rPr/>
-              <a:t> — hourly, closing, corrections, events</a:t>
+              <a:t>unknown</a:t>
+            </a:r>
+            <a:r>
+              <a:rPr/>
+              <a:t>, never guessed, so the splits always reconcile to the total.</a:t>
             </a:r>
           </a:p>
         </p:txBody>
@@ -3599,90 +3628,1388 @@
             </a:pPr>
             <a:r>
               <a:rPr/>
-              <a:t>Configuration stays on the machine</a:t>
-            </a:r>
-          </a:p>
-        </p:txBody>
-      </p:sp>
-      <p:sp>
-        <p:nvSpPr>
-          <p:cNvPr id="3" name="Content Placeholder 2"/>
-          <p:cNvSpPr>
-            <a:spLocks noGrp="1"/>
-          </p:cNvSpPr>
-          <p:nvPr>
-            <p:ph idx="1"/>
-          </p:nvPr>
-        </p:nvSpPr>
-        <p:spPr/>
-        <p:txBody>
-          <a:bodyPr/>
-          <a:lstStyle/>
-          <a:p>
-            <a:pPr lvl="0" indent="0" marL="0">
-              <a:buNone/>
-            </a:pPr>
-            <a:r>
-              <a:rPr/>
-              <a:t>Three JSON files, written by the application, excluded from source control, seeded from committed templates:</a:t>
-            </a:r>
-          </a:p>
-          <a:p>
-            <a:pPr lvl="0"/>
-            <a:r>
-              <a:rPr>
-                <a:latin typeface="Courier"/>
-              </a:rPr>
-              <a:t>sources.json</a:t>
-            </a:r>
-            <a:r>
-              <a:rPr/>
-              <a:t> — the live and video source sets</a:t>
-            </a:r>
-          </a:p>
-          <a:p>
-            <a:pPr lvl="0"/>
-            <a:r>
-              <a:rPr>
-                <a:latin typeface="Courier"/>
-              </a:rPr>
-              <a:t>lines.json</a:t>
-            </a:r>
-            <a:r>
-              <a:rPr/>
-              <a:t> — trigger lines and counting areas, in normalised coordinates</a:t>
-            </a:r>
-          </a:p>
-          <a:p>
-            <a:pPr lvl="0"/>
-            <a:r>
-              <a:rPr>
-                <a:latin typeface="Courier"/>
-              </a:rPr>
-              <a:t>site.json</a:t>
-            </a:r>
-            <a:r>
-              <a:rPr/>
-              <a:t> — hours, capacity, thresholds</a:t>
-            </a:r>
-          </a:p>
-          <a:p>
-            <a:pPr lvl="0" indent="0" marL="0">
-              <a:buNone/>
-            </a:pPr>
-            <a:r>
-              <a:rPr/>
-              <a:t>A source update can never collide with a machine’s own calibration, and camera credentials never reach the repository.</a:t>
-            </a:r>
-          </a:p>
-        </p:txBody>
-      </p:sp>
+              <a:t>Counting areas have a role: count only inside</a:t>
+            </a:r>
+          </a:p>
+        </p:txBody>
+      </p:sp>
+      <p:pic>
+        <p:nvPicPr>
+          <p:cNvPr descr="figures/06_area_count.jpg" id="0" name="Picture 1"/>
+          <p:cNvPicPr>
+            <a:picLocks noGrp="1" noChangeAspect="1"/>
+          </p:cNvPicPr>
+          <p:nvPr/>
+        </p:nvPicPr>
+        <p:blipFill>
+          <a:blip r:embed="rId2"/>
+          <a:stretch>
+            <a:fillRect/>
+          </a:stretch>
+        </p:blipFill>
+        <p:spPr bwMode="auto">
+          <a:xfrm>
+            <a:off x="2311400" y="1193800"/>
+            <a:ext cx="4521200" cy="3390900"/>
+          </a:xfrm>
+          <a:prstGeom prst="rect">
+            <a:avLst/>
+          </a:prstGeom>
+          <a:noFill/>
+          <a:ln w="9525">
+            <a:noFill/>
+            <a:headEnd/>
+            <a:tailEnd/>
+          </a:ln>
+        </p:spPr>
+      </p:pic>
     </p:spTree>
   </p:cSld>
 </p:sld>
 </file>
 
 <file path=ppt/slides/slide14.xml><?xml version="1.0" encoding="utf-8"?>
+<p:sld xmlns:a="http://schemas.openxmlformats.org/drawingml/2006/main" xmlns:r="http://schemas.openxmlformats.org/officeDocument/2006/relationships" xmlns:p="http://schemas.openxmlformats.org/presentationml/2006/main">
+  <p:cSld>
+    <p:spTree>
+      <p:nvGrpSpPr>
+        <p:cNvPr id="1" name=""/>
+        <p:cNvGrpSpPr/>
+        <p:nvPr/>
+      </p:nvGrpSpPr>
+      <p:grpSpPr>
+        <a:xfrm>
+          <a:off x="0" y="0"/>
+          <a:ext cx="0" cy="0"/>
+          <a:chOff x="0" y="0"/>
+          <a:chExt cx="0" cy="0"/>
+        </a:xfrm>
+      </p:grpSpPr>
+      <p:sp>
+        <p:nvSpPr>
+          <p:cNvPr id="3" name="Content Placeholder 2"/>
+          <p:cNvSpPr>
+            <a:spLocks noGrp="1"/>
+          </p:cNvSpPr>
+          <p:nvPr>
+            <p:ph idx="1"/>
+          </p:nvPr>
+        </p:nvSpPr>
+        <p:spPr/>
+        <p:txBody>
+          <a:bodyPr/>
+          <a:lstStyle/>
+          <a:p>
+            <a:pPr lvl="0" indent="0" marL="0">
+              <a:buNone/>
+            </a:pPr>
+            <a:r>
+              <a:rPr/>
+              <a:t>Only people inside the box are tracked at all — outside is dimmed, and the people there carry no boxes. The area reports its own population: </a:t>
+            </a:r>
+            <a:r>
+              <a:rPr>
+                <a:latin typeface="Courier"/>
+              </a:rPr>
+              <a:t>2 HERE 1M 1F 2A 0C</a:t>
+            </a:r>
+            <a:r>
+              <a:rPr/>
+              <a:t>.</a:t>
+            </a:r>
+          </a:p>
+        </p:txBody>
+      </p:sp>
+    </p:spTree>
+  </p:cSld>
+</p:sld>
+</file>
+
+<file path=ppt/slides/slide15.xml><?xml version="1.0" encoding="utf-8"?>
+<p:sld xmlns:a="http://schemas.openxmlformats.org/drawingml/2006/main" xmlns:r="http://schemas.openxmlformats.org/officeDocument/2006/relationships" xmlns:p="http://schemas.openxmlformats.org/presentationml/2006/main">
+  <p:cSld>
+    <p:spTree>
+      <p:nvGrpSpPr>
+        <p:cNvPr id="1" name=""/>
+        <p:cNvGrpSpPr/>
+        <p:nvPr/>
+      </p:nvGrpSpPr>
+      <p:grpSpPr>
+        <a:xfrm>
+          <a:off x="0" y="0"/>
+          <a:ext cx="0" cy="0"/>
+          <a:chOff x="0" y="0"/>
+          <a:chExt cx="0" cy="0"/>
+        </a:xfrm>
+      </p:grpSpPr>
+      <p:sp>
+        <p:nvSpPr>
+          <p:cNvPr id="2" name="Title 1"/>
+          <p:cNvSpPr>
+            <a:spLocks noGrp="1"/>
+          </p:cNvSpPr>
+          <p:nvPr>
+            <p:ph type="title"/>
+          </p:nvPr>
+        </p:nvSpPr>
+        <p:spPr/>
+        <p:txBody>
+          <a:bodyPr/>
+          <a:lstStyle/>
+          <a:p>
+            <a:pPr lvl="0" indent="0" marL="0">
+              <a:buNone/>
+            </a:pPr>
+            <a:r>
+              <a:rPr/>
+              <a:t>Ignore inside</a:t>
+            </a:r>
+          </a:p>
+        </p:txBody>
+      </p:sp>
+      <p:pic>
+        <p:nvPicPr>
+          <p:cNvPr descr="figures/07_area_ignore.jpg" id="0" name="Picture 1"/>
+          <p:cNvPicPr>
+            <a:picLocks noGrp="1" noChangeAspect="1"/>
+          </p:cNvPicPr>
+          <p:nvPr/>
+        </p:nvPicPr>
+        <p:blipFill>
+          <a:blip r:embed="rId2"/>
+          <a:stretch>
+            <a:fillRect/>
+          </a:stretch>
+        </p:blipFill>
+        <p:spPr bwMode="auto">
+          <a:xfrm>
+            <a:off x="2311400" y="1193800"/>
+            <a:ext cx="4521200" cy="3390900"/>
+          </a:xfrm>
+          <a:prstGeom prst="rect">
+            <a:avLst/>
+          </a:prstGeom>
+          <a:noFill/>
+          <a:ln w="9525">
+            <a:noFill/>
+            <a:headEnd/>
+            <a:tailEnd/>
+          </a:ln>
+        </p:spPr>
+      </p:pic>
+    </p:spTree>
+  </p:cSld>
+</p:sld>
+</file>
+
+<file path=ppt/slides/slide16.xml><?xml version="1.0" encoding="utf-8"?>
+<p:sld xmlns:a="http://schemas.openxmlformats.org/drawingml/2006/main" xmlns:r="http://schemas.openxmlformats.org/officeDocument/2006/relationships" xmlns:p="http://schemas.openxmlformats.org/presentationml/2006/main">
+  <p:cSld>
+    <p:spTree>
+      <p:nvGrpSpPr>
+        <p:cNvPr id="1" name=""/>
+        <p:cNvGrpSpPr/>
+        <p:nvPr/>
+      </p:nvGrpSpPr>
+      <p:grpSpPr>
+        <a:xfrm>
+          <a:off x="0" y="0"/>
+          <a:ext cx="0" cy="0"/>
+          <a:chOff x="0" y="0"/>
+          <a:chExt cx="0" cy="0"/>
+        </a:xfrm>
+      </p:grpSpPr>
+      <p:sp>
+        <p:nvSpPr>
+          <p:cNvPr id="3" name="Content Placeholder 2"/>
+          <p:cNvSpPr>
+            <a:spLocks noGrp="1"/>
+          </p:cNvSpPr>
+          <p:nvPr>
+            <p:ph idx="1"/>
+          </p:nvPr>
+        </p:nvSpPr>
+        <p:spPr/>
+        <p:txBody>
+          <a:bodyPr/>
+          <a:lstStyle/>
+          <a:p>
+            <a:pPr lvl="0" indent="0" marL="0">
+              <a:buNone/>
+            </a:pPr>
+            <a:r>
+              <a:rPr/>
+              <a:t>The mirror image: people inside the box are skipped entirely. For a window, a mirror, a poster or a screen that the detector would otherwise count.</a:t>
+            </a:r>
+          </a:p>
+        </p:txBody>
+      </p:sp>
+    </p:spTree>
+  </p:cSld>
+</p:sld>
+</file>
+
+<file path=ppt/slides/slide17.xml><?xml version="1.0" encoding="utf-8"?>
+<p:sld xmlns:a="http://schemas.openxmlformats.org/drawingml/2006/main" xmlns:r="http://schemas.openxmlformats.org/officeDocument/2006/relationships" xmlns:p="http://schemas.openxmlformats.org/presentationml/2006/main">
+  <p:cSld>
+    <p:spTree>
+      <p:nvGrpSpPr>
+        <p:cNvPr id="1" name=""/>
+        <p:cNvGrpSpPr/>
+        <p:nvPr/>
+      </p:nvGrpSpPr>
+      <p:grpSpPr>
+        <a:xfrm>
+          <a:off x="0" y="0"/>
+          <a:ext cx="0" cy="0"/>
+          <a:chOff x="0" y="0"/>
+          <a:chExt cx="0" cy="0"/>
+        </a:xfrm>
+      </p:grpSpPr>
+      <p:sp>
+        <p:nvSpPr>
+          <p:cNvPr id="2" name="Title 1"/>
+          <p:cNvSpPr>
+            <a:spLocks noGrp="1"/>
+          </p:cNvSpPr>
+          <p:nvPr>
+            <p:ph type="title"/>
+          </p:nvPr>
+        </p:nvSpPr>
+        <p:spPr/>
+        <p:txBody>
+          <a:bodyPr/>
+          <a:lstStyle/>
+          <a:p>
+            <a:pPr lvl="0" indent="0" marL="0">
+              <a:buNone/>
+            </a:pPr>
+            <a:r>
+              <a:rPr/>
+              <a:t>Classify only inside</a:t>
+            </a:r>
+          </a:p>
+        </p:txBody>
+      </p:sp>
+      <p:pic>
+        <p:nvPicPr>
+          <p:cNvPr descr="figures/08_area_classify.jpg" id="0" name="Picture 1"/>
+          <p:cNvPicPr>
+            <a:picLocks noGrp="1" noChangeAspect="1"/>
+          </p:cNvPicPr>
+          <p:nvPr/>
+        </p:nvPicPr>
+        <p:blipFill>
+          <a:blip r:embed="rId2"/>
+          <a:stretch>
+            <a:fillRect/>
+          </a:stretch>
+        </p:blipFill>
+        <p:spPr bwMode="auto">
+          <a:xfrm>
+            <a:off x="2311400" y="1193800"/>
+            <a:ext cx="4521200" cy="3390900"/>
+          </a:xfrm>
+          <a:prstGeom prst="rect">
+            <a:avLst/>
+          </a:prstGeom>
+          <a:noFill/>
+          <a:ln w="9525">
+            <a:noFill/>
+            <a:headEnd/>
+            <a:tailEnd/>
+          </a:ln>
+        </p:spPr>
+      </p:pic>
+    </p:spTree>
+  </p:cSld>
+</p:sld>
+</file>
+
+<file path=ppt/slides/slide18.xml><?xml version="1.0" encoding="utf-8"?>
+<p:sld xmlns:a="http://schemas.openxmlformats.org/drawingml/2006/main" xmlns:r="http://schemas.openxmlformats.org/officeDocument/2006/relationships" xmlns:p="http://schemas.openxmlformats.org/presentationml/2006/main">
+  <p:cSld>
+    <p:spTree>
+      <p:nvGrpSpPr>
+        <p:cNvPr id="1" name=""/>
+        <p:cNvGrpSpPr/>
+        <p:nvPr/>
+      </p:nvGrpSpPr>
+      <p:grpSpPr>
+        <a:xfrm>
+          <a:off x="0" y="0"/>
+          <a:ext cx="0" cy="0"/>
+          <a:chOff x="0" y="0"/>
+          <a:chExt cx="0" cy="0"/>
+        </a:xfrm>
+      </p:grpSpPr>
+      <p:sp>
+        <p:nvSpPr>
+          <p:cNvPr id="3" name="Content Placeholder 2"/>
+          <p:cNvSpPr>
+            <a:spLocks noGrp="1"/>
+          </p:cNvSpPr>
+          <p:nvPr>
+            <p:ph idx="1"/>
+          </p:nvPr>
+        </p:nvSpPr>
+        <p:spPr/>
+        <p:txBody>
+          <a:bodyPr/>
+          <a:lstStyle/>
+          <a:p>
+            <a:pPr lvl="0" indent="0" marL="0">
+              <a:buNone/>
+            </a:pPr>
+            <a:r>
+              <a:rPr/>
+              <a:t>Everyone is still counted; only those inside are sexed and aged. The accuracy lever on a wide scene — spend the crop budget where people are large and clear, instead of on distant figures.</a:t>
+            </a:r>
+          </a:p>
+        </p:txBody>
+      </p:sp>
+    </p:spTree>
+  </p:cSld>
+</p:sld>
+</file>
+
+<file path=ppt/slides/slide19.xml><?xml version="1.0" encoding="utf-8"?>
+<p:sld xmlns:a="http://schemas.openxmlformats.org/drawingml/2006/main" xmlns:r="http://schemas.openxmlformats.org/officeDocument/2006/relationships" xmlns:p="http://schemas.openxmlformats.org/presentationml/2006/main">
+  <p:cSld>
+    <p:spTree>
+      <p:nvGrpSpPr>
+        <p:cNvPr id="1" name=""/>
+        <p:cNvGrpSpPr/>
+        <p:nvPr/>
+      </p:nvGrpSpPr>
+      <p:grpSpPr>
+        <a:xfrm>
+          <a:off x="0" y="0"/>
+          <a:ext cx="0" cy="0"/>
+          <a:chOff x="0" y="0"/>
+          <a:chExt cx="0" cy="0"/>
+        </a:xfrm>
+      </p:grpSpPr>
+      <p:sp>
+        <p:nvSpPr>
+          <p:cNvPr id="2" name="Title 1"/>
+          <p:cNvSpPr>
+            <a:spLocks noGrp="1"/>
+          </p:cNvSpPr>
+          <p:nvPr>
+            <p:ph type="title"/>
+          </p:nvPr>
+        </p:nvSpPr>
+        <p:spPr>
+          <a:xfrm>
+            <a:off x="457201" y="204787"/>
+            <a:ext cx="3008313" cy="871538"/>
+          </a:xfrm>
+        </p:spPr>
+        <p:txBody>
+          <a:bodyPr/>
+          <a:lstStyle/>
+          <a:p>
+            <a:pPr lvl="0" indent="0" marL="0">
+              <a:buNone/>
+            </a:pPr>
+            <a:r>
+              <a:rPr/>
+              <a:t>Why the role matters</a:t>
+            </a:r>
+          </a:p>
+        </p:txBody>
+      </p:sp>
+      <p:sp>
+        <p:nvSpPr>
+          <p:cNvPr id="4" name="Text Placeholder 3"/>
+          <p:cNvSpPr>
+            <a:spLocks noGrp="1"/>
+          </p:cNvSpPr>
+          <p:nvPr>
+            <p:ph idx="2" sz="half" type="body"/>
+          </p:nvPr>
+        </p:nvSpPr>
+        <p:spPr/>
+        <p:txBody>
+          <a:bodyPr/>
+          <a:lstStyle/>
+          <a:p>
+            <a:pPr lvl="0" indent="0" marL="0">
+              <a:buNone/>
+            </a:pPr>
+            <a:r>
+              <a:rPr/>
+              <a:t>Restricting what is </a:t>
+            </a:r>
+            <a:r>
+              <a:rPr b="1"/>
+              <a:t>tracked</a:t>
+            </a:r>
+            <a:r>
+              <a:rPr/>
+              <a:t> and restricting what is </a:t>
+            </a:r>
+            <a:r>
+              <a:rPr b="1"/>
+              <a:t>classified</a:t>
+            </a:r>
+            <a:r>
+              <a:rPr/>
+              <a:t> are different needs.</a:t>
+            </a:r>
+          </a:p>
+        </p:txBody>
+      </p:sp>
+      <p:graphicFrame>
+        <p:nvGraphicFramePr>
+          <p:cNvPr id="6" name="Content Placeholder 5"/>
+          <p:cNvGraphicFramePr>
+            <a:graphicFrameLocks noGrp="1"/>
+          </p:cNvGraphicFramePr>
+          <p:nvPr>
+            <p:ph idx="1"/>
+          </p:nvPr>
+        </p:nvGraphicFramePr>
+        <p:xfrm>
+          <a:off x="3568700" y="203200"/>
+          <a:ext cx="5105400" cy="4381500"/>
+        </p:xfrm>
+        <a:graphic>
+          <a:graphicData uri="http://schemas.openxmlformats.org/drawingml/2006/table">
+            <a:tbl>
+              <a:tblPr firstRow="1" bandRow="1">
+                <a:tableStyleId>{5C22544A-7EE6-4342-B048-85BDC9FD1C3A}</a:tableStyleId>
+              </a:tblPr>
+              <a:tblGrid>
+                <a:gridCol w="1270000"/>
+                <a:gridCol w="1270000"/>
+                <a:gridCol w="1270000"/>
+                <a:gridCol w="1270000"/>
+              </a:tblGrid>
+              <a:tr h="0">
+                <a:tc>
+                  <a:txBody>
+                    <a:bodyPr/>
+                    <a:lstStyle/>
+                    <a:p>
+                      <a:pPr lvl="0" indent="0" marL="0">
+                        <a:buNone/>
+                      </a:pPr>
+                      <a:r>
+                        <a:rPr/>
+                        <a:t>role</a:t>
+                      </a:r>
+                    </a:p>
+                  </a:txBody>
+                  <a:tcPr/>
+                </a:tc>
+                <a:tc>
+                  <a:txBody>
+                    <a:bodyPr/>
+                    <a:lstStyle/>
+                    <a:p>
+                      <a:pPr lvl="0" indent="0" marL="0">
+                        <a:buNone/>
+                      </a:pPr>
+                      <a:r>
+                        <a:rPr/>
+                        <a:t>tracking</a:t>
+                      </a:r>
+                    </a:p>
+                  </a:txBody>
+                  <a:tcPr/>
+                </a:tc>
+                <a:tc>
+                  <a:txBody>
+                    <a:bodyPr/>
+                    <a:lstStyle/>
+                    <a:p>
+                      <a:pPr lvl="0" indent="0" marL="0">
+                        <a:buNone/>
+                      </a:pPr>
+                      <a:r>
+                        <a:rPr/>
+                        <a:t>classifying</a:t>
+                      </a:r>
+                    </a:p>
+                  </a:txBody>
+                  <a:tcPr/>
+                </a:tc>
+                <a:tc>
+                  <a:txBody>
+                    <a:bodyPr/>
+                    <a:lstStyle/>
+                    <a:p>
+                      <a:pPr lvl="0" indent="0" marL="0">
+                        <a:buNone/>
+                      </a:pPr>
+                      <a:r>
+                        <a:rPr/>
+                        <a:t>line may sit outside?</a:t>
+                      </a:r>
+                    </a:p>
+                  </a:txBody>
+                  <a:tcPr/>
+                </a:tc>
+              </a:tr>
+              <a:tr h="0">
+                <a:tc>
+                  <a:txBody>
+                    <a:bodyPr/>
+                    <a:lstStyle/>
+                    <a:p>
+                      <a:pPr lvl="0" indent="0" marL="0">
+                        <a:buNone/>
+                      </a:pPr>
+                      <a:r>
+                        <a:rPr/>
+                        <a:t>count only inside</a:t>
+                      </a:r>
+                    </a:p>
+                  </a:txBody>
+                </a:tc>
+                <a:tc>
+                  <a:txBody>
+                    <a:bodyPr/>
+                    <a:lstStyle/>
+                    <a:p>
+                      <a:pPr lvl="0" indent="0" marL="0">
+                        <a:buNone/>
+                      </a:pPr>
+                      <a:r>
+                        <a:rPr/>
+                        <a:t>inside only</a:t>
+                      </a:r>
+                    </a:p>
+                  </a:txBody>
+                </a:tc>
+                <a:tc>
+                  <a:txBody>
+                    <a:bodyPr/>
+                    <a:lstStyle/>
+                    <a:p>
+                      <a:pPr lvl="0" indent="0" marL="0">
+                        <a:buNone/>
+                      </a:pPr>
+                      <a:r>
+                        <a:rPr/>
+                        <a:t>inside only</a:t>
+                      </a:r>
+                    </a:p>
+                  </a:txBody>
+                </a:tc>
+                <a:tc>
+                  <a:txBody>
+                    <a:bodyPr/>
+                    <a:lstStyle/>
+                    <a:p>
+                      <a:pPr lvl="0" indent="0" marL="0">
+                        <a:buNone/>
+                      </a:pPr>
+                      <a:r>
+                        <a:rPr b="1"/>
+                        <a:t>no</a:t>
+                      </a:r>
+                      <a:r>
+                        <a:rPr/>
+                        <a:t> — saving warns</a:t>
+                      </a:r>
+                    </a:p>
+                  </a:txBody>
+                </a:tc>
+              </a:tr>
+              <a:tr h="0">
+                <a:tc>
+                  <a:txBody>
+                    <a:bodyPr/>
+                    <a:lstStyle/>
+                    <a:p>
+                      <a:pPr lvl="0" indent="0" marL="0">
+                        <a:buNone/>
+                      </a:pPr>
+                      <a:r>
+                        <a:rPr/>
+                        <a:t>ignore inside</a:t>
+                      </a:r>
+                    </a:p>
+                  </a:txBody>
+                </a:tc>
+                <a:tc>
+                  <a:txBody>
+                    <a:bodyPr/>
+                    <a:lstStyle/>
+                    <a:p>
+                      <a:pPr lvl="0" indent="0" marL="0">
+                        <a:buNone/>
+                      </a:pPr>
+                      <a:r>
+                        <a:rPr/>
+                        <a:t>outside only</a:t>
+                      </a:r>
+                    </a:p>
+                  </a:txBody>
+                </a:tc>
+                <a:tc>
+                  <a:txBody>
+                    <a:bodyPr/>
+                    <a:lstStyle/>
+                    <a:p>
+                      <a:pPr lvl="0" indent="0" marL="0">
+                        <a:buNone/>
+                      </a:pPr>
+                      <a:r>
+                        <a:rPr/>
+                        <a:t>everyone tracked</a:t>
+                      </a:r>
+                    </a:p>
+                  </a:txBody>
+                </a:tc>
+                <a:tc>
+                  <a:txBody>
+                    <a:bodyPr/>
+                    <a:lstStyle/>
+                    <a:p>
+                      <a:pPr lvl="0" indent="0" marL="0">
+                        <a:buNone/>
+                      </a:pPr>
+                      <a:r>
+                        <a:rPr/>
+                        <a:t>yes</a:t>
+                      </a:r>
+                    </a:p>
+                  </a:txBody>
+                </a:tc>
+              </a:tr>
+              <a:tr h="0">
+                <a:tc>
+                  <a:txBody>
+                    <a:bodyPr/>
+                    <a:lstStyle/>
+                    <a:p>
+                      <a:pPr lvl="0" indent="0" marL="0">
+                        <a:buNone/>
+                      </a:pPr>
+                      <a:r>
+                        <a:rPr/>
+                        <a:t>classify only inside</a:t>
+                      </a:r>
+                    </a:p>
+                  </a:txBody>
+                </a:tc>
+                <a:tc>
+                  <a:txBody>
+                    <a:bodyPr/>
+                    <a:lstStyle/>
+                    <a:p>
+                      <a:pPr lvl="0" indent="0" marL="0">
+                        <a:buNone/>
+                      </a:pPr>
+                      <a:r>
+                        <a:rPr/>
+                        <a:t>everyone</a:t>
+                      </a:r>
+                    </a:p>
+                  </a:txBody>
+                </a:tc>
+                <a:tc>
+                  <a:txBody>
+                    <a:bodyPr/>
+                    <a:lstStyle/>
+                    <a:p>
+                      <a:pPr lvl="0" indent="0" marL="0">
+                        <a:buNone/>
+                      </a:pPr>
+                      <a:r>
+                        <a:rPr/>
+                        <a:t>inside only</a:t>
+                      </a:r>
+                    </a:p>
+                  </a:txBody>
+                </a:tc>
+                <a:tc>
+                  <a:txBody>
+                    <a:bodyPr/>
+                    <a:lstStyle/>
+                    <a:p>
+                      <a:pPr lvl="0" indent="0" marL="0">
+                        <a:buNone/>
+                      </a:pPr>
+                      <a:r>
+                        <a:rPr/>
+                        <a:t>yes</a:t>
+                      </a:r>
+                    </a:p>
+                  </a:txBody>
+                </a:tc>
+              </a:tr>
+            </a:tbl>
+          </a:graphicData>
+        </a:graphic>
+      </p:graphicFrame>
+    </p:spTree>
+  </p:cSld>
+</p:sld>
+</file>
+
+<file path=ppt/slides/slide2.xml><?xml version="1.0" encoding="utf-8"?>
+<p:sld xmlns:a="http://schemas.openxmlformats.org/drawingml/2006/main" xmlns:r="http://schemas.openxmlformats.org/officeDocument/2006/relationships" xmlns:p="http://schemas.openxmlformats.org/presentationml/2006/main">
+  <p:cSld>
+    <p:spTree>
+      <p:nvGrpSpPr>
+        <p:cNvPr id="1" name=""/>
+        <p:cNvGrpSpPr/>
+        <p:nvPr/>
+      </p:nvGrpSpPr>
+      <p:grpSpPr>
+        <a:xfrm>
+          <a:off x="0" y="0"/>
+          <a:ext cx="0" cy="0"/>
+          <a:chOff x="0" y="0"/>
+          <a:chExt cx="0" cy="0"/>
+        </a:xfrm>
+      </p:grpSpPr>
+      <p:sp>
+        <p:nvSpPr>
+          <p:cNvPr id="2" name="Title 1"/>
+          <p:cNvSpPr>
+            <a:spLocks noGrp="1"/>
+          </p:cNvSpPr>
+          <p:nvPr>
+            <p:ph type="title"/>
+          </p:nvPr>
+        </p:nvSpPr>
+        <p:spPr/>
+        <p:txBody>
+          <a:bodyPr/>
+          <a:lstStyle/>
+          <a:p>
+            <a:pPr lvl="0" indent="0" marL="0">
+              <a:buNone/>
+            </a:pPr>
+            <a:r>
+              <a:rPr/>
+              <a:t>Visitor counting on the CCTV a venue already has</a:t>
+            </a:r>
+          </a:p>
+        </p:txBody>
+      </p:sp>
+      <p:pic>
+        <p:nvPicPr>
+          <p:cNvPr descr="figures/01_console.jpg" id="0" name="Picture 1"/>
+          <p:cNvPicPr>
+            <a:picLocks noGrp="1" noChangeAspect="1"/>
+          </p:cNvPicPr>
+          <p:nvPr/>
+        </p:nvPicPr>
+        <p:blipFill>
+          <a:blip r:embed="rId2"/>
+          <a:stretch>
+            <a:fillRect/>
+          </a:stretch>
+        </p:blipFill>
+        <p:spPr bwMode="auto">
+          <a:xfrm>
+            <a:off x="1562100" y="1193800"/>
+            <a:ext cx="6032500" cy="3390900"/>
+          </a:xfrm>
+          <a:prstGeom prst="rect">
+            <a:avLst/>
+          </a:prstGeom>
+          <a:noFill/>
+          <a:ln w="9525">
+            <a:noFill/>
+            <a:headEnd/>
+            <a:tailEnd/>
+          </a:ln>
+        </p:spPr>
+      </p:pic>
+    </p:spTree>
+  </p:cSld>
+</p:sld>
+</file>
+
+<file path=ppt/slides/slide20.xml><?xml version="1.0" encoding="utf-8"?>
+<p:sld xmlns:a="http://schemas.openxmlformats.org/drawingml/2006/main" xmlns:r="http://schemas.openxmlformats.org/officeDocument/2006/relationships" xmlns:p="http://schemas.openxmlformats.org/presentationml/2006/main">
+  <p:cSld>
+    <p:spTree>
+      <p:nvGrpSpPr>
+        <p:cNvPr id="1" name=""/>
+        <p:cNvGrpSpPr/>
+        <p:nvPr/>
+      </p:nvGrpSpPr>
+      <p:grpSpPr>
+        <a:xfrm>
+          <a:off x="0" y="0"/>
+          <a:ext cx="0" cy="0"/>
+          <a:chOff x="0" y="0"/>
+          <a:chExt cx="0" cy="0"/>
+        </a:xfrm>
+      </p:grpSpPr>
+      <p:sp>
+        <p:nvSpPr>
+          <p:cNvPr id="3" name="Content Placeholder 2"/>
+          <p:cNvSpPr>
+            <a:spLocks noGrp="1"/>
+          </p:cNvSpPr>
+          <p:nvPr>
+            <p:ph idx="1"/>
+          </p:nvPr>
+        </p:nvSpPr>
+        <p:spPr/>
+        <p:txBody>
+          <a:bodyPr/>
+          <a:lstStyle/>
+          <a:p>
+            <a:pPr lvl="0" indent="0" marL="0">
+              <a:buNone/>
+            </a:pPr>
+            <a:r>
+              <a:rPr i="1"/>
+              <a:t>Count only inside</a:t>
+            </a:r>
+            <a:r>
+              <a:rPr/>
+              <a:t> must contain the whole trigger line: a person is only tracked once inside the box, so one approaching from outside is first seen already at the line. The console says so rather than quietly counting nothing.</a:t>
+            </a:r>
+          </a:p>
+        </p:txBody>
+      </p:sp>
+    </p:spTree>
+  </p:cSld>
+</p:sld>
+</file>
+
+<file path=ppt/slides/slide21.xml><?xml version="1.0" encoding="utf-8"?>
+<p:sld xmlns:a="http://schemas.openxmlformats.org/drawingml/2006/main" xmlns:r="http://schemas.openxmlformats.org/officeDocument/2006/relationships" xmlns:p="http://schemas.openxmlformats.org/presentationml/2006/main">
+  <p:cSld>
+    <p:spTree>
+      <p:nvGrpSpPr>
+        <p:cNvPr id="1" name=""/>
+        <p:cNvGrpSpPr/>
+        <p:nvPr/>
+      </p:nvGrpSpPr>
+      <p:grpSpPr>
+        <a:xfrm>
+          <a:off x="0" y="0"/>
+          <a:ext cx="0" cy="0"/>
+          <a:chOff x="0" y="0"/>
+          <a:chExt cx="0" cy="0"/>
+        </a:xfrm>
+      </p:grpSpPr>
+      <p:sp>
+        <p:nvSpPr>
+          <p:cNvPr id="2" name="Title 1"/>
+          <p:cNvSpPr>
+            <a:spLocks noGrp="1"/>
+          </p:cNvSpPr>
+          <p:nvPr>
+            <p:ph type="title"/>
+          </p:nvPr>
+        </p:nvSpPr>
+        <p:spPr/>
+        <p:txBody>
+          <a:bodyPr/>
+          <a:lstStyle/>
+          <a:p>
+            <a:pPr lvl="0" indent="0" marL="0">
+              <a:buNone/>
+            </a:pPr>
+            <a:r>
+              <a:rPr/>
+              <a:t>Cameras</a:t>
+            </a:r>
+          </a:p>
+        </p:txBody>
+      </p:sp>
+      <p:pic>
+        <p:nvPicPr>
+          <p:cNvPr descr="figures/03_camera_list.png" id="0" name="Picture 1"/>
+          <p:cNvPicPr>
+            <a:picLocks noGrp="1" noChangeAspect="1"/>
+          </p:cNvPicPr>
+          <p:nvPr/>
+        </p:nvPicPr>
+        <p:blipFill>
+          <a:blip r:embed="rId2"/>
+          <a:stretch>
+            <a:fillRect/>
+          </a:stretch>
+        </p:blipFill>
+        <p:spPr bwMode="auto">
+          <a:xfrm>
+            <a:off x="2794000" y="1193800"/>
+            <a:ext cx="3556000" cy="3390900"/>
+          </a:xfrm>
+          <a:prstGeom prst="rect">
+            <a:avLst/>
+          </a:prstGeom>
+          <a:noFill/>
+          <a:ln w="9525">
+            <a:noFill/>
+            <a:headEnd/>
+            <a:tailEnd/>
+          </a:ln>
+        </p:spPr>
+      </p:pic>
+    </p:spTree>
+  </p:cSld>
+</p:sld>
+</file>
+
+<file path=ppt/slides/slide22.xml><?xml version="1.0" encoding="utf-8"?>
+<p:sld xmlns:a="http://schemas.openxmlformats.org/drawingml/2006/main" xmlns:r="http://schemas.openxmlformats.org/officeDocument/2006/relationships" xmlns:p="http://schemas.openxmlformats.org/presentationml/2006/main">
+  <p:cSld>
+    <p:spTree>
+      <p:nvGrpSpPr>
+        <p:cNvPr id="1" name=""/>
+        <p:cNvGrpSpPr/>
+        <p:nvPr/>
+      </p:nvGrpSpPr>
+      <p:grpSpPr>
+        <a:xfrm>
+          <a:off x="0" y="0"/>
+          <a:ext cx="0" cy="0"/>
+          <a:chOff x="0" y="0"/>
+          <a:chExt cx="0" cy="0"/>
+        </a:xfrm>
+      </p:grpSpPr>
+      <p:sp>
+        <p:nvSpPr>
+          <p:cNvPr id="3" name="Content Placeholder 2"/>
+          <p:cNvSpPr>
+            <a:spLocks noGrp="1"/>
+          </p:cNvSpPr>
+          <p:nvPr>
+            <p:ph idx="1"/>
+          </p:nvPr>
+        </p:nvSpPr>
+        <p:spPr/>
+        <p:txBody>
+          <a:bodyPr/>
+          <a:lstStyle/>
+          <a:p>
+            <a:pPr lvl="0"/>
+            <a:r>
+              <a:rPr/>
+              <a:t>Up to </a:t>
+            </a:r>
+            <a:r>
+              <a:rPr b="1"/>
+              <a:t>six</a:t>
+            </a:r>
+            <a:r>
+              <a:rPr/>
+              <a:t>, added and removed while running</a:t>
+            </a:r>
+          </a:p>
+          <a:p>
+            <a:pPr lvl="0"/>
+            <a:r>
+              <a:rPr/>
+              <a:t>One row per camera, whatever the count; the list scrolls on its own</a:t>
+            </a:r>
+          </a:p>
+          <a:p>
+            <a:pPr lvl="0"/>
+            <a:r>
+              <a:rPr/>
+              <a:t>Paired feeds: one key swaps a panel between its live camera and a saved clip</a:t>
+            </a:r>
+          </a:p>
+          <a:p>
+            <a:pPr lvl="0"/>
+            <a:r>
+              <a:rPr/>
+              <a:t>An offline camera </a:t>
+            </a:r>
+            <a:r>
+              <a:rPr b="1"/>
+              <a:t>hides its figures</a:t>
+            </a:r>
+            <a:r>
+              <a:rPr/>
+              <a:t> rather than showing frozen ones</a:t>
+            </a:r>
+          </a:p>
+        </p:txBody>
+      </p:sp>
+    </p:spTree>
+  </p:cSld>
+</p:sld>
+</file>
+
+<file path=ppt/slides/slide23.xml><?xml version="1.0" encoding="utf-8"?>
+<p:sld xmlns:a="http://schemas.openxmlformats.org/drawingml/2006/main" xmlns:r="http://schemas.openxmlformats.org/officeDocument/2006/relationships" xmlns:p="http://schemas.openxmlformats.org/presentationml/2006/main">
+  <p:cSld>
+    <p:spTree>
+      <p:nvGrpSpPr>
+        <p:cNvPr id="1" name=""/>
+        <p:cNvGrpSpPr/>
+        <p:nvPr/>
+      </p:nvGrpSpPr>
+      <p:grpSpPr>
+        <a:xfrm>
+          <a:off x="0" y="0"/>
+          <a:ext cx="0" cy="0"/>
+          <a:chOff x="0" y="0"/>
+          <a:chExt cx="0" cy="0"/>
+        </a:xfrm>
+      </p:grpSpPr>
+      <p:sp>
+        <p:nvSpPr>
+          <p:cNvPr id="2" name="Title 1"/>
+          <p:cNvSpPr>
+            <a:spLocks noGrp="1"/>
+          </p:cNvSpPr>
+          <p:nvPr>
+            <p:ph type="title"/>
+          </p:nvPr>
+        </p:nvSpPr>
+        <p:spPr/>
+        <p:txBody>
+          <a:bodyPr/>
+          <a:lstStyle/>
+          <a:p>
+            <a:pPr lvl="0" indent="0" marL="0">
+              <a:buNone/>
+            </a:pPr>
+            <a:r>
+              <a:rPr/>
+              <a:t>Capacity, alerts, evidence</a:t>
+            </a:r>
+          </a:p>
+        </p:txBody>
+      </p:sp>
+      <p:pic>
+        <p:nvPicPr>
+          <p:cNvPr descr="figures/09_alarm.png" id="0" name="Picture 1"/>
+          <p:cNvPicPr>
+            <a:picLocks noGrp="1" noChangeAspect="1"/>
+          </p:cNvPicPr>
+          <p:nvPr/>
+        </p:nvPicPr>
+        <p:blipFill>
+          <a:blip r:embed="rId2"/>
+          <a:stretch>
+            <a:fillRect/>
+          </a:stretch>
+        </p:blipFill>
+        <p:spPr bwMode="auto">
+          <a:xfrm>
+            <a:off x="2298700" y="1193800"/>
+            <a:ext cx="4546600" cy="3390900"/>
+          </a:xfrm>
+          <a:prstGeom prst="rect">
+            <a:avLst/>
+          </a:prstGeom>
+          <a:noFill/>
+          <a:ln w="9525">
+            <a:noFill/>
+            <a:headEnd/>
+            <a:tailEnd/>
+          </a:ln>
+        </p:spPr>
+      </p:pic>
+    </p:spTree>
+  </p:cSld>
+</p:sld>
+</file>
+
+<file path=ppt/slides/slide24.xml><?xml version="1.0" encoding="utf-8"?>
+<p:sld xmlns:a="http://schemas.openxmlformats.org/drawingml/2006/main" xmlns:r="http://schemas.openxmlformats.org/officeDocument/2006/relationships" xmlns:p="http://schemas.openxmlformats.org/presentationml/2006/main">
+  <p:cSld>
+    <p:spTree>
+      <p:nvGrpSpPr>
+        <p:cNvPr id="1" name=""/>
+        <p:cNvGrpSpPr/>
+        <p:nvPr/>
+      </p:nvGrpSpPr>
+      <p:grpSpPr>
+        <a:xfrm>
+          <a:off x="0" y="0"/>
+          <a:ext cx="0" cy="0"/>
+          <a:chOff x="0" y="0"/>
+          <a:chExt cx="0" cy="0"/>
+        </a:xfrm>
+      </p:grpSpPr>
+      <p:sp>
+        <p:nvSpPr>
+          <p:cNvPr id="3" name="Content Placeholder 2"/>
+          <p:cNvSpPr>
+            <a:spLocks noGrp="1"/>
+          </p:cNvSpPr>
+          <p:nvPr>
+            <p:ph idx="1"/>
+          </p:nvPr>
+        </p:nvSpPr>
+        <p:spPr/>
+        <p:txBody>
+          <a:bodyPr/>
+          <a:lstStyle/>
+          <a:p>
+            <a:pPr lvl="0" indent="0" marL="0">
+              <a:buNone/>
+            </a:pPr>
+            <a:r>
+              <a:rPr/>
+              <a:t>The banner names the entrance that tipped the count, a clip is recorded automatically, and any entrance can carry its own limit.</a:t>
+            </a:r>
+          </a:p>
+        </p:txBody>
+      </p:sp>
+    </p:spTree>
+  </p:cSld>
+</p:sld>
+</file>
+
+<file path=ppt/slides/slide25.xml><?xml version="1.0" encoding="utf-8"?>
+<p:sld xmlns:a="http://schemas.openxmlformats.org/drawingml/2006/main" xmlns:r="http://schemas.openxmlformats.org/officeDocument/2006/relationships" xmlns:p="http://schemas.openxmlformats.org/presentationml/2006/main">
+  <p:cSld>
+    <p:spTree>
+      <p:nvGrpSpPr>
+        <p:cNvPr id="1" name=""/>
+        <p:cNvGrpSpPr/>
+        <p:nvPr/>
+      </p:nvGrpSpPr>
+      <p:grpSpPr>
+        <a:xfrm>
+          <a:off x="0" y="0"/>
+          <a:ext cx="0" cy="0"/>
+          <a:chOff x="0" y="0"/>
+          <a:chExt cx="0" cy="0"/>
+        </a:xfrm>
+      </p:grpSpPr>
+      <p:sp>
+        <p:nvSpPr>
+          <p:cNvPr id="2" name="Title 1"/>
+          <p:cNvSpPr>
+            <a:spLocks noGrp="1"/>
+          </p:cNvSpPr>
+          <p:nvPr>
+            <p:ph type="title"/>
+          </p:nvPr>
+        </p:nvSpPr>
+        <p:spPr/>
+        <p:txBody>
+          <a:bodyPr/>
+          <a:lstStyle/>
+          <a:p>
+            <a:pPr lvl="0" indent="0" marL="0">
+              <a:buNone/>
+            </a:pPr>
+            <a:r>
+              <a:rPr/>
+              <a:t>Interfaces and data</a:t>
+            </a:r>
+          </a:p>
+        </p:txBody>
+      </p:sp>
+      <p:sp>
+        <p:nvSpPr>
+          <p:cNvPr id="3" name="Content Placeholder 2"/>
+          <p:cNvSpPr>
+            <a:spLocks noGrp="1"/>
+          </p:cNvSpPr>
+          <p:nvPr>
+            <p:ph idx="1"/>
+          </p:nvPr>
+        </p:nvSpPr>
+        <p:spPr/>
+        <p:txBody>
+          <a:bodyPr/>
+          <a:lstStyle/>
+          <a:p>
+            <a:pPr lvl="0"/>
+            <a:r>
+              <a:rPr b="1"/>
+              <a:t>24 HTTP and WebSocket endpoints</a:t>
+            </a:r>
+            <a:r>
+              <a:rPr/>
+              <a:t> — state, history, cameras, lines, areas, capacity, recording</a:t>
+            </a:r>
+          </a:p>
+          <a:p>
+            <a:pPr lvl="0"/>
+            <a:r>
+              <a:rPr b="1"/>
+              <a:t>MJPEG</a:t>
+            </a:r>
+            <a:r>
+              <a:rPr/>
+              <a:t> overlay stream per camera, encoded once and shared between viewers</a:t>
+            </a:r>
+          </a:p>
+          <a:p>
+            <a:pPr lvl="0"/>
+            <a:r>
+              <a:rPr b="1"/>
+              <a:t>JSON state</a:t>
+            </a:r>
+            <a:r>
+              <a:rPr/>
+              <a:t> pushed over WebSocket at about 4 Hz</a:t>
+            </a:r>
+          </a:p>
+          <a:p>
+            <a:pPr lvl="0" indent="0" marL="0">
+              <a:buNone/>
+            </a:pPr>
+            <a:r>
+              <a:rPr>
+                <a:latin typeface="Courier"/>
+              </a:rPr>
+              <a:t>events.csv</a:t>
+            </a:r>
+            <a:r>
+              <a:rPr/>
+              <a:t> — one row per crossing, with the probabilities and observation count behind the decision, so any number can be audited back to the frames that produced it.</a:t>
+            </a:r>
+          </a:p>
+          <a:p>
+            <a:pPr lvl="0" indent="0" marL="0">
+              <a:buNone/>
+            </a:pPr>
+            <a:r>
+              <a:rPr>
+                <a:latin typeface="Courier"/>
+              </a:rPr>
+              <a:t>history.csv</a:t>
+            </a:r>
+            <a:r>
+              <a:rPr/>
+              <a:t> — hourly rows, closing totals, corrections, recorded events.</a:t>
+            </a:r>
+          </a:p>
+        </p:txBody>
+      </p:sp>
+    </p:spTree>
+  </p:cSld>
+</p:sld>
+</file>
+
+<file path=ppt/slides/slide26.xml><?xml version="1.0" encoding="utf-8"?>
+<p:sld xmlns:a="http://schemas.openxmlformats.org/drawingml/2006/main" xmlns:r="http://schemas.openxmlformats.org/officeDocument/2006/relationships" xmlns:p="http://schemas.openxmlformats.org/presentationml/2006/main">
+  <p:cSld>
+    <p:spTree>
+      <p:nvGrpSpPr>
+        <p:cNvPr id="1" name=""/>
+        <p:cNvGrpSpPr/>
+        <p:nvPr/>
+      </p:nvGrpSpPr>
+      <p:grpSpPr>
+        <a:xfrm>
+          <a:off x="0" y="0"/>
+          <a:ext cx="0" cy="0"/>
+          <a:chOff x="0" y="0"/>
+          <a:chExt cx="0" cy="0"/>
+        </a:xfrm>
+      </p:grpSpPr>
+      <p:sp>
+        <p:nvSpPr>
+          <p:cNvPr id="2" name="Title 1"/>
+          <p:cNvSpPr>
+            <a:spLocks noGrp="1"/>
+          </p:cNvSpPr>
+          <p:nvPr>
+            <p:ph type="title"/>
+          </p:nvPr>
+        </p:nvSpPr>
+        <p:spPr/>
+        <p:txBody>
+          <a:bodyPr/>
+          <a:lstStyle/>
+          <a:p>
+            <a:pPr lvl="0" indent="0" marL="0">
+              <a:buNone/>
+            </a:pPr>
+            <a:r>
+              <a:rPr/>
+              <a:t>Configuration stays on the machine</a:t>
+            </a:r>
+          </a:p>
+        </p:txBody>
+      </p:sp>
+      <p:sp>
+        <p:nvSpPr>
+          <p:cNvPr id="3" name="Content Placeholder 2"/>
+          <p:cNvSpPr>
+            <a:spLocks noGrp="1"/>
+          </p:cNvSpPr>
+          <p:nvPr>
+            <p:ph idx="1"/>
+          </p:nvPr>
+        </p:nvSpPr>
+        <p:spPr/>
+        <p:txBody>
+          <a:bodyPr/>
+          <a:lstStyle/>
+          <a:p>
+            <a:pPr lvl="0" indent="0" marL="0">
+              <a:buNone/>
+            </a:pPr>
+            <a:r>
+              <a:rPr/>
+              <a:t>Three JSON files, written by the application, excluded from source control, seeded from committed templates:</a:t>
+            </a:r>
+          </a:p>
+          <a:p>
+            <a:pPr lvl="0"/>
+            <a:r>
+              <a:rPr>
+                <a:latin typeface="Courier"/>
+              </a:rPr>
+              <a:t>sources.json</a:t>
+            </a:r>
+            <a:r>
+              <a:rPr/>
+              <a:t> — the live and video source sets</a:t>
+            </a:r>
+          </a:p>
+          <a:p>
+            <a:pPr lvl="0"/>
+            <a:r>
+              <a:rPr>
+                <a:latin typeface="Courier"/>
+              </a:rPr>
+              <a:t>lines.json</a:t>
+            </a:r>
+            <a:r>
+              <a:rPr/>
+              <a:t> — trigger lines and counting areas, in normalised coordinates</a:t>
+            </a:r>
+          </a:p>
+          <a:p>
+            <a:pPr lvl="0"/>
+            <a:r>
+              <a:rPr>
+                <a:latin typeface="Courier"/>
+              </a:rPr>
+              <a:t>site.json</a:t>
+            </a:r>
+            <a:r>
+              <a:rPr/>
+              <a:t> — hours, capacity, thresholds</a:t>
+            </a:r>
+          </a:p>
+          <a:p>
+            <a:pPr lvl="0" indent="0" marL="0">
+              <a:buNone/>
+            </a:pPr>
+            <a:r>
+              <a:rPr/>
+              <a:t>A source update can never collide with a machine’s own calibration, and camera credentials never reach the repository.</a:t>
+            </a:r>
+          </a:p>
+        </p:txBody>
+      </p:sp>
+    </p:spTree>
+  </p:cSld>
+</p:sld>
+</file>
+
+<file path=ppt/slides/slide27.xml><?xml version="1.0" encoding="utf-8"?>
 <p:sld xmlns:a="http://schemas.openxmlformats.org/drawingml/2006/main" xmlns:r="http://schemas.openxmlformats.org/officeDocument/2006/relationships" xmlns:p="http://schemas.openxmlformats.org/presentationml/2006/main">
   <p:cSld>
     <p:spTree>
@@ -3919,7 +5246,7 @@
 </p:sld>
 </file>
 
-<file path=ppt/slides/slide15.xml><?xml version="1.0" encoding="utf-8"?>
+<file path=ppt/slides/slide28.xml><?xml version="1.0" encoding="utf-8"?>
 <p:sld xmlns:a="http://schemas.openxmlformats.org/drawingml/2006/main" xmlns:r="http://schemas.openxmlformats.org/officeDocument/2006/relationships" xmlns:p="http://schemas.openxmlformats.org/presentationml/2006/main">
   <p:cSld>
     <p:spTree>
@@ -3974,7 +5301,7 @@
 </p:sld>
 </file>
 
-<file path=ppt/slides/slide16.xml><?xml version="1.0" encoding="utf-8"?>
+<file path=ppt/slides/slide29.xml><?xml version="1.0" encoding="utf-8"?>
 <p:sld xmlns:a="http://schemas.openxmlformats.org/drawingml/2006/main" xmlns:r="http://schemas.openxmlformats.org/officeDocument/2006/relationships" xmlns:p="http://schemas.openxmlformats.org/presentationml/2006/main">
   <p:cSld>
     <p:spTree>
@@ -4038,7 +5365,7 @@
             </a:r>
             <a:r>
               <a:rPr/>
-              <a:t> It needs the camera to see heads cleanly across the line — overhead or high-angle works best.</a:t>
+              <a:t> It needs the camera to see heads cleanly across the line — overhead or high-angle works best, along a corridor is much harder.</a:t>
             </a:r>
           </a:p>
           <a:p>
@@ -4049,7 +5376,7 @@
             </a:r>
             <a:r>
               <a:rPr/>
-              <a:t>, not a purpose-trained attribute model.</a:t>
+              <a:t>, not a purpose-trained attribute model, and will not match one.</a:t>
             </a:r>
           </a:p>
           <a:p>
@@ -4060,7 +5387,7 @@
             </a:r>
             <a:r>
               <a:rPr/>
-              <a:t>, and are reported as unknown rather than guessed.</a:t>
+              <a:t>, and are reported as unknown.</a:t>
             </a:r>
           </a:p>
           <a:p>
@@ -4072,233 +5399,6 @@
             <a:r>
               <a:rPr/>
               <a:t> Offering this as a network service may oblige disclosure or a commercial licence. One file imports it.</a:t>
-            </a:r>
-          </a:p>
-        </p:txBody>
-      </p:sp>
-    </p:spTree>
-  </p:cSld>
-</p:sld>
-</file>
-
-<file path=ppt/slides/slide17.xml><?xml version="1.0" encoding="utf-8"?>
-<p:sld xmlns:a="http://schemas.openxmlformats.org/drawingml/2006/main" xmlns:r="http://schemas.openxmlformats.org/officeDocument/2006/relationships" xmlns:p="http://schemas.openxmlformats.org/presentationml/2006/main">
-  <p:cSld>
-    <p:spTree>
-      <p:nvGrpSpPr>
-        <p:cNvPr id="1" name=""/>
-        <p:cNvGrpSpPr/>
-        <p:nvPr/>
-      </p:nvGrpSpPr>
-      <p:grpSpPr>
-        <a:xfrm>
-          <a:off x="0" y="0"/>
-          <a:ext cx="0" cy="0"/>
-          <a:chOff x="0" y="0"/>
-          <a:chExt cx="0" cy="0"/>
-        </a:xfrm>
-      </p:grpSpPr>
-      <p:sp>
-        <p:nvSpPr>
-          <p:cNvPr id="2" name="Title 1"/>
-          <p:cNvSpPr>
-            <a:spLocks noGrp="1"/>
-          </p:cNvSpPr>
-          <p:nvPr>
-            <p:ph type="title"/>
-          </p:nvPr>
-        </p:nvSpPr>
-        <p:spPr/>
-        <p:txBody>
-          <a:bodyPr/>
-          <a:lstStyle/>
-          <a:p>
-            <a:pPr lvl="0" indent="0" marL="0">
-              <a:buNone/>
-            </a:pPr>
-            <a:r>
-              <a:rPr/>
-              <a:t>Summary</a:t>
-            </a:r>
-          </a:p>
-        </p:txBody>
-      </p:sp>
-      <p:sp>
-        <p:nvSpPr>
-          <p:cNvPr id="3" name="Content Placeholder 2"/>
-          <p:cNvSpPr>
-            <a:spLocks noGrp="1"/>
-          </p:cNvSpPr>
-          <p:nvPr>
-            <p:ph idx="1"/>
-          </p:nvPr>
-        </p:nvSpPr>
-        <p:spPr/>
-        <p:txBody>
-          <a:bodyPr/>
-          <a:lstStyle/>
-          <a:p>
-            <a:pPr lvl="0"/>
-            <a:r>
-              <a:rPr/>
-              <a:t>Runs on existing CCTV, one machine, no cloud</a:t>
-            </a:r>
-          </a:p>
-          <a:p>
-            <a:pPr lvl="0"/>
-            <a:r>
-              <a:rPr/>
-              <a:t>Two figures that mean different things, and never conflated</a:t>
-            </a:r>
-          </a:p>
-          <a:p>
-            <a:pPr lvl="0"/>
-            <a:r>
-              <a:rPr/>
-              <a:t>Accuracy work is measured, not asserted</a:t>
-            </a:r>
-          </a:p>
-          <a:p>
-            <a:pPr lvl="0"/>
-            <a:r>
-              <a:rPr/>
-              <a:t>Unknowns are reported, not guessed</a:t>
-            </a:r>
-          </a:p>
-          <a:p>
-            <a:pPr lvl="0"/>
-            <a:r>
-              <a:rPr/>
-              <a:t>Every number auditable back to the frames that produced it</a:t>
-            </a:r>
-          </a:p>
-        </p:txBody>
-      </p:sp>
-    </p:spTree>
-  </p:cSld>
-</p:sld>
-</file>
-
-<file path=ppt/slides/slide2.xml><?xml version="1.0" encoding="utf-8"?>
-<p:sld xmlns:a="http://schemas.openxmlformats.org/drawingml/2006/main" xmlns:r="http://schemas.openxmlformats.org/officeDocument/2006/relationships" xmlns:p="http://schemas.openxmlformats.org/presentationml/2006/main">
-  <p:cSld>
-    <p:spTree>
-      <p:nvGrpSpPr>
-        <p:cNvPr id="1" name=""/>
-        <p:cNvGrpSpPr/>
-        <p:nvPr/>
-      </p:nvGrpSpPr>
-      <p:grpSpPr>
-        <a:xfrm>
-          <a:off x="0" y="0"/>
-          <a:ext cx="0" cy="0"/>
-          <a:chOff x="0" y="0"/>
-          <a:chExt cx="0" cy="0"/>
-        </a:xfrm>
-      </p:grpSpPr>
-      <p:sp>
-        <p:nvSpPr>
-          <p:cNvPr id="2" name="Title 1"/>
-          <p:cNvSpPr>
-            <a:spLocks noGrp="1"/>
-          </p:cNvSpPr>
-          <p:nvPr>
-            <p:ph type="title"/>
-          </p:nvPr>
-        </p:nvSpPr>
-        <p:spPr/>
-        <p:txBody>
-          <a:bodyPr/>
-          <a:lstStyle/>
-          <a:p>
-            <a:pPr lvl="0" indent="0" marL="0">
-              <a:buNone/>
-            </a:pPr>
-            <a:r>
-              <a:rPr/>
-              <a:t>What it is</a:t>
-            </a:r>
-          </a:p>
-        </p:txBody>
-      </p:sp>
-      <p:sp>
-        <p:nvSpPr>
-          <p:cNvPr id="3" name="Content Placeholder 2"/>
-          <p:cNvSpPr>
-            <a:spLocks noGrp="1"/>
-          </p:cNvSpPr>
-          <p:nvPr>
-            <p:ph idx="1"/>
-          </p:nvPr>
-        </p:nvSpPr>
-        <p:spPr/>
-        <p:txBody>
-          <a:bodyPr/>
-          <a:lstStyle/>
-          <a:p>
-            <a:pPr lvl="0" indent="0" marL="0">
-              <a:buNone/>
-            </a:pPr>
-            <a:r>
-              <a:rPr/>
-              <a:t>Visitor counting on the CCTV a venue already has.</a:t>
-            </a:r>
-          </a:p>
-          <a:p>
-            <a:pPr lvl="0"/>
-            <a:r>
-              <a:rPr/>
-              <a:t>A trigger line drawn across each entrance</a:t>
-            </a:r>
-          </a:p>
-          <a:p>
-            <a:pPr lvl="0"/>
-            <a:r>
-              <a:rPr/>
-              <a:t>A person is counted when their </a:t>
-            </a:r>
-            <a:r>
-              <a:rPr b="1"/>
-              <a:t>head point</a:t>
-            </a:r>
-            <a:r>
-              <a:rPr/>
-              <a:t> crosses it</a:t>
-            </a:r>
-          </a:p>
-          <a:p>
-            <a:pPr lvl="0"/>
-            <a:r>
-              <a:rPr/>
-              <a:t>Zero-shot classification gives </a:t>
-            </a:r>
-            <a:r>
-              <a:rPr b="1"/>
-              <a:t>male / female</a:t>
-            </a:r>
-            <a:r>
-              <a:rPr/>
-              <a:t> and </a:t>
-            </a:r>
-            <a:r>
-              <a:rPr b="1"/>
-              <a:t>adult / child</a:t>
-            </a:r>
-          </a:p>
-          <a:p>
-            <a:pPr lvl="0"/>
-            <a:r>
-              <a:rPr/>
-              <a:t>No turnstile, no new hardware, no app</a:t>
-            </a:r>
-          </a:p>
-          <a:p>
-            <a:pPr lvl="0" indent="0" marL="0">
-              <a:buNone/>
-            </a:pPr>
-            <a:r>
-              <a:rPr/>
-              <a:t>One machine with a GPU runs everything. No database, no cloud, no per-site training.</a:t>
             </a:r>
           </a:p>
         </p:txBody>
@@ -4327,6 +5427,53 @@
       </p:grpSpPr>
       <p:sp>
         <p:nvSpPr>
+          <p:cNvPr id="3" name="Content Placeholder 2"/>
+          <p:cNvSpPr>
+            <a:spLocks noGrp="1"/>
+          </p:cNvSpPr>
+          <p:nvPr>
+            <p:ph idx="1"/>
+          </p:nvPr>
+        </p:nvSpPr>
+        <p:spPr/>
+        <p:txBody>
+          <a:bodyPr/>
+          <a:lstStyle/>
+          <a:p>
+            <a:pPr lvl="0" indent="0" marL="0">
+              <a:buNone/>
+            </a:pPr>
+            <a:r>
+              <a:rPr/>
+              <a:t>Five entrances, one site. No turnstile, no new hardware, no app.</a:t>
+            </a:r>
+          </a:p>
+        </p:txBody>
+      </p:sp>
+    </p:spTree>
+  </p:cSld>
+</p:sld>
+</file>
+
+<file path=ppt/slides/slide30.xml><?xml version="1.0" encoding="utf-8"?>
+<p:sld xmlns:a="http://schemas.openxmlformats.org/drawingml/2006/main" xmlns:r="http://schemas.openxmlformats.org/officeDocument/2006/relationships" xmlns:p="http://schemas.openxmlformats.org/presentationml/2006/main">
+  <p:cSld>
+    <p:spTree>
+      <p:nvGrpSpPr>
+        <p:cNvPr id="1" name=""/>
+        <p:cNvGrpSpPr/>
+        <p:nvPr/>
+      </p:nvGrpSpPr>
+      <p:grpSpPr>
+        <a:xfrm>
+          <a:off x="0" y="0"/>
+          <a:ext cx="0" cy="0"/>
+          <a:chOff x="0" y="0"/>
+          <a:chExt cx="0" cy="0"/>
+        </a:xfrm>
+      </p:grpSpPr>
+      <p:sp>
+        <p:nvSpPr>
           <p:cNvPr id="2" name="Title 1"/>
           <p:cNvSpPr>
             <a:spLocks noGrp="1"/>
@@ -4345,7 +5492,7 @@
             </a:pPr>
             <a:r>
               <a:rPr/>
-              <a:t>How it works</a:t>
+              <a:t>Summary</a:t>
             </a:r>
           </a:p>
         </p:txBody>
@@ -4365,21 +5512,54 @@
           <a:bodyPr/>
           <a:lstStyle/>
           <a:p>
-            <a:pPr lvl="0" indent="0">
-              <a:buNone/>
-            </a:pPr>
-            <a:r>
-              <a:rPr>
-                <a:latin typeface="Courier"/>
-              </a:rPr>
-              <a:t>RTSP / HTTP / file
-  -&gt; threaded decode, one thread per source
-  -&gt; YOLO11 detection, one batched pass for all cameras
-  -&gt; ByteTrack, one tracker per camera
-  -&gt; head point crosses the line -&gt; entry (+1) / exit (-1)
-  -&gt; SigLIP 2 gender and adult/child on selected crops
-  -&gt; counters, alerts, CSV logs
-  -&gt; MJPEG overlays + JSON state over WebSocket</a:t>
+            <a:pPr lvl="0"/>
+            <a:r>
+              <a:rPr/>
+              <a:t>Runs on existing CCTV, one machine, no cloud, no per-site training</a:t>
+            </a:r>
+          </a:p>
+          <a:p>
+            <a:pPr lvl="0"/>
+            <a:r>
+              <a:rPr/>
+              <a:t>Two figures that mean different things, and are never conflated</a:t>
+            </a:r>
+          </a:p>
+          <a:p>
+            <a:pPr lvl="0"/>
+            <a:r>
+              <a:rPr/>
+              <a:t>Accuracy work is </a:t>
+            </a:r>
+            <a:r>
+              <a:rPr b="1"/>
+              <a:t>measured</a:t>
+            </a:r>
+            <a:r>
+              <a:rPr/>
+              <a:t>, not asserted</a:t>
+            </a:r>
+          </a:p>
+          <a:p>
+            <a:pPr lvl="0"/>
+            <a:r>
+              <a:rPr/>
+              <a:t>Unknowns are </a:t>
+            </a:r>
+            <a:r>
+              <a:rPr b="1"/>
+              <a:t>reported</a:t>
+            </a:r>
+            <a:r>
+              <a:rPr/>
+              <a:t>, not guessed</a:t>
+            </a:r>
+          </a:p>
+          <a:p>
+            <a:pPr lvl="0"/>
+            <a:r>
+              <a:rPr/>
+              <a:t>Every number is auditable back to the frames that produced it</a:t>
             </a:r>
           </a:p>
         </p:txBody>
@@ -4426,67 +5606,41 @@
             </a:pPr>
             <a:r>
               <a:rPr/>
-              <a:t>Two figures, deliberately different</a:t>
-            </a:r>
-          </a:p>
-        </p:txBody>
-      </p:sp>
-      <p:sp>
-        <p:nvSpPr>
-          <p:cNvPr id="3" name="Content Placeholder 2"/>
-          <p:cNvSpPr>
-            <a:spLocks noGrp="1"/>
-          </p:cNvSpPr>
-          <p:nvPr>
-            <p:ph idx="1"/>
-          </p:nvPr>
-        </p:nvSpPr>
-        <p:spPr/>
-        <p:txBody>
-          <a:bodyPr/>
-          <a:lstStyle/>
-          <a:p>
-            <a:pPr lvl="0"/>
-            <a:r>
-              <a:rPr b="1"/>
-              <a:t>Visitors today</a:t>
-            </a:r>
-            <a:r>
-              <a:rPr/>
-              <a:t> counts entries only and never falls</a:t>
-            </a:r>
-          </a:p>
-          <a:p>
-            <a:pPr lvl="0"/>
-            <a:r>
-              <a:rPr b="1"/>
-              <a:t>Current occupancy</a:t>
-            </a:r>
-            <a:r>
-              <a:rPr/>
-              <a:t> is net and falls again when people leave</a:t>
-            </a:r>
-          </a:p>
-          <a:p>
-            <a:pPr lvl="0" indent="0" marL="0">
-              <a:buNone/>
-            </a:pPr>
-            <a:r>
-              <a:rPr/>
-              <a:t>Someone who walks in and out has still visited.</a:t>
-            </a:r>
-          </a:p>
-          <a:p>
-            <a:pPr lvl="0" indent="0" marL="0">
-              <a:buNone/>
-            </a:pPr>
-            <a:r>
-              <a:rPr/>
-              <a:t>Conflating the two is the most common way a footfall dashboard misleads.</a:t>
-            </a:r>
-          </a:p>
-        </p:txBody>
-      </p:sp>
+              <a:t>What the operator sees</a:t>
+            </a:r>
+          </a:p>
+        </p:txBody>
+      </p:sp>
+      <p:pic>
+        <p:nvPicPr>
+          <p:cNvPr descr="figures/02_panel.png" id="0" name="Picture 1"/>
+          <p:cNvPicPr>
+            <a:picLocks noGrp="1" noChangeAspect="1"/>
+          </p:cNvPicPr>
+          <p:nvPr/>
+        </p:nvPicPr>
+        <p:blipFill>
+          <a:blip r:embed="rId2"/>
+          <a:stretch>
+            <a:fillRect/>
+          </a:stretch>
+        </p:blipFill>
+        <p:spPr bwMode="auto">
+          <a:xfrm>
+            <a:off x="1536700" y="1193800"/>
+            <a:ext cx="6070600" cy="3390900"/>
+          </a:xfrm>
+          <a:prstGeom prst="rect">
+            <a:avLst/>
+          </a:prstGeom>
+          <a:noFill/>
+          <a:ln w="9525">
+            <a:noFill/>
+            <a:headEnd/>
+            <a:tailEnd/>
+          </a:ln>
+        </p:spPr>
+      </p:pic>
     </p:spTree>
   </p:cSld>
 </p:sld>
@@ -4511,12 +5665,12 @@
       </p:grpSpPr>
       <p:sp>
         <p:nvSpPr>
-          <p:cNvPr id="2" name="Title 1"/>
-          <p:cNvSpPr>
-            <a:spLocks noGrp="1"/>
-          </p:cNvSpPr>
-          <p:nvPr>
-            <p:ph type="title"/>
+          <p:cNvPr id="3" name="Content Placeholder 2"/>
+          <p:cNvSpPr>
+            <a:spLocks noGrp="1"/>
+          </p:cNvSpPr>
+          <p:nvPr>
+            <p:ph idx="1"/>
           </p:nvPr>
         </p:nvSpPr>
         <p:spPr/>
@@ -4529,75 +5683,7 @@
             </a:pPr>
             <a:r>
               <a:rPr/>
-              <a:t>Counting: the parts that stop a wrong number looking right</a:t>
-            </a:r>
-          </a:p>
-        </p:txBody>
-      </p:sp>
-      <p:sp>
-        <p:nvSpPr>
-          <p:cNvPr id="3" name="Content Placeholder 2"/>
-          <p:cNvSpPr>
-            <a:spLocks noGrp="1"/>
-          </p:cNvSpPr>
-          <p:nvPr>
-            <p:ph idx="1"/>
-          </p:nvPr>
-        </p:nvSpPr>
-        <p:spPr/>
-        <p:txBody>
-          <a:bodyPr/>
-          <a:lstStyle/>
-          <a:p>
-            <a:pPr lvl="0"/>
-            <a:r>
-              <a:rPr b="1"/>
-              <a:t>8 % tolerance</a:t>
-            </a:r>
-            <a:r>
-              <a:rPr/>
-              <a:t> past each end of the line — and it is </a:t>
-            </a:r>
-            <a:r>
-              <a:rPr i="1"/>
-              <a:t>drawn</a:t>
-            </a:r>
-            <a:r>
-              <a:rPr/>
-              <a:t>, because an invisible tolerance is indistinguishable from a bug</a:t>
-            </a:r>
-          </a:p>
-          <a:p>
-            <a:pPr lvl="0"/>
-            <a:r>
-              <a:rPr b="1"/>
-              <a:t>4 % edge warning</a:t>
-            </a:r>
-            <a:r>
-              <a:rPr/>
-              <a:t> — a line too near the frame edge fires before the tracker has established the person</a:t>
-            </a:r>
-          </a:p>
-          <a:p>
-            <a:pPr lvl="0"/>
-            <a:r>
-              <a:rPr b="1"/>
-              <a:t>Hysteresis + multi-frame confirmation</a:t>
-            </a:r>
-            <a:r>
-              <a:rPr/>
-              <a:t> absorb detector jitter</a:t>
-            </a:r>
-          </a:p>
-          <a:p>
-            <a:pPr lvl="0"/>
-            <a:r>
-              <a:rPr b="1"/>
-              <a:t>One event per side transition per track</a:t>
-            </a:r>
-            <a:r>
-              <a:rPr/>
-              <a:t>; a new track at the same spot is treated as an ID switch and ignored</a:t>
+              <a:t>Visitors today, current occupancy and every camera, side by side.</a:t>
             </a:r>
           </a:p>
         </p:txBody>
@@ -4634,246 +5720,51 @@
             <p:ph type="title"/>
           </p:nvPr>
         </p:nvSpPr>
-        <p:spPr>
+        <p:spPr/>
+        <p:txBody>
+          <a:bodyPr/>
+          <a:lstStyle/>
+          <a:p>
+            <a:pPr lvl="0" indent="0" marL="0">
+              <a:buNone/>
+            </a:pPr>
+            <a:r>
+              <a:rPr/>
+              <a:t>Two figures, deliberately different</a:t>
+            </a:r>
+          </a:p>
+        </p:txBody>
+      </p:sp>
+      <p:pic>
+        <p:nvPicPr>
+          <p:cNvPr descr="figures/04_two_figures.png" id="0" name="Picture 1"/>
+          <p:cNvPicPr>
+            <a:picLocks noGrp="1" noChangeAspect="1"/>
+          </p:cNvPicPr>
+          <p:nvPr/>
+        </p:nvPicPr>
+        <p:blipFill>
+          <a:blip r:embed="rId2"/>
+          <a:stretch>
+            <a:fillRect/>
+          </a:stretch>
+        </p:blipFill>
+        <p:spPr bwMode="auto">
           <a:xfrm>
-            <a:off x="457201" y="204787"/>
-            <a:ext cx="3008313" cy="871538"/>
+            <a:off x="2133600" y="1193800"/>
+            <a:ext cx="4876800" cy="3390900"/>
           </a:xfrm>
+          <a:prstGeom prst="rect">
+            <a:avLst/>
+          </a:prstGeom>
+          <a:noFill/>
+          <a:ln w="9525">
+            <a:noFill/>
+            <a:headEnd/>
+            <a:tailEnd/>
+          </a:ln>
         </p:spPr>
-        <p:txBody>
-          <a:bodyPr/>
-          <a:lstStyle/>
-          <a:p>
-            <a:pPr lvl="0" indent="0" marL="0">
-              <a:buNone/>
-            </a:pPr>
-            <a:r>
-              <a:rPr/>
-              <a:t>Demographics: two attributes, two strategies</a:t>
-            </a:r>
-          </a:p>
-        </p:txBody>
-      </p:sp>
-      <p:sp>
-        <p:nvSpPr>
-          <p:cNvPr id="4" name="Text Placeholder 3"/>
-          <p:cNvSpPr>
-            <a:spLocks noGrp="1"/>
-          </p:cNvSpPr>
-          <p:nvPr>
-            <p:ph idx="2" sz="half" type="body"/>
-          </p:nvPr>
-        </p:nvSpPr>
-        <p:spPr/>
-        <p:txBody>
-          <a:bodyPr/>
-          <a:lstStyle/>
-          <a:p>
-            <a:pPr lvl="0"/>
-            <a:r>
-              <a:rPr b="1"/>
-              <a:t>Gender</a:t>
-            </a:r>
-            <a:r>
-              <a:rPr/>
-              <a:t> — last three looks plus one at the moment of crossing, counted double. The read swings early in a track and settles at the line.</a:t>
-            </a:r>
-          </a:p>
-          <a:p>
-            <a:pPr lvl="0"/>
-            <a:r>
-              <a:rPr b="1"/>
-              <a:t>Age</a:t>
-            </a:r>
-            <a:r>
-              <a:rPr/>
-              <a:t> — averages every observation. “Child” is noisy per frame and smooths out.</a:t>
-            </a:r>
-          </a:p>
-          <a:p>
-            <a:pPr lvl="0" indent="0" marL="0">
-              <a:buNone/>
-            </a:pPr>
-            <a:r>
-              <a:rPr/>
-              <a:t>Measured on 56 hand-labelled crossings:</a:t>
-            </a:r>
-          </a:p>
-        </p:txBody>
-      </p:sp>
-      <p:graphicFrame>
-        <p:nvGraphicFramePr>
-          <p:cNvPr id="6" name="Content Placeholder 5"/>
-          <p:cNvGraphicFramePr>
-            <a:graphicFrameLocks noGrp="1"/>
-          </p:cNvGraphicFramePr>
-          <p:nvPr>
-            <p:ph idx="1"/>
-          </p:nvPr>
-        </p:nvGraphicFramePr>
-        <p:xfrm>
-          <a:off x="3568700" y="203200"/>
-          <a:ext cx="5105400" cy="4381500"/>
-        </p:xfrm>
-        <a:graphic>
-          <a:graphicData uri="http://schemas.openxmlformats.org/drawingml/2006/table">
-            <a:tbl>
-              <a:tblPr firstRow="1" bandRow="1">
-                <a:tableStyleId>{5C22544A-7EE6-4342-B048-85BDC9FD1C3A}</a:tableStyleId>
-              </a:tblPr>
-              <a:tblGrid>
-                <a:gridCol w="1701800"/>
-                <a:gridCol w="1701800"/>
-                <a:gridCol w="1701800"/>
-              </a:tblGrid>
-              <a:tr h="0">
-                <a:tc>
-                  <a:txBody>
-                    <a:bodyPr/>
-                    <a:lstStyle/>
-                    <a:p>
-                      <a:pPr lvl="0" indent="0" marL="0">
-                        <a:buNone/>
-                      </a:pPr>
-                      <a:r>
-                        <a:rPr/>
-                        <a:t>attribute</a:t>
-                      </a:r>
-                    </a:p>
-                  </a:txBody>
-                  <a:tcPr/>
-                </a:tc>
-                <a:tc>
-                  <a:txBody>
-                    <a:bodyPr/>
-                    <a:lstStyle/>
-                    <a:p>
-                      <a:pPr lvl="0" indent="0" marL="0">
-                        <a:buNone/>
-                      </a:pPr>
-                      <a:r>
-                        <a:rPr/>
-                        <a:t>averaging</a:t>
-                      </a:r>
-                    </a:p>
-                  </a:txBody>
-                  <a:tcPr/>
-                </a:tc>
-                <a:tc>
-                  <a:txBody>
-                    <a:bodyPr/>
-                    <a:lstStyle/>
-                    <a:p>
-                      <a:pPr lvl="0" indent="0" marL="0">
-                        <a:buNone/>
-                      </a:pPr>
-                      <a:r>
-                        <a:rPr/>
-                        <a:t>split strategy</a:t>
-                      </a:r>
-                    </a:p>
-                  </a:txBody>
-                  <a:tcPr/>
-                </a:tc>
-              </a:tr>
-              <a:tr h="0">
-                <a:tc>
-                  <a:txBody>
-                    <a:bodyPr/>
-                    <a:lstStyle/>
-                    <a:p>
-                      <a:pPr lvl="0" indent="0" marL="0">
-                        <a:buNone/>
-                      </a:pPr>
-                      <a:r>
-                        <a:rPr/>
-                        <a:t>gender</a:t>
-                      </a:r>
-                    </a:p>
-                  </a:txBody>
-                </a:tc>
-                <a:tc>
-                  <a:txBody>
-                    <a:bodyPr/>
-                    <a:lstStyle/>
-                    <a:p>
-                      <a:pPr lvl="0" indent="0" marL="0">
-                        <a:buNone/>
-                      </a:pPr>
-                      <a:r>
-                        <a:rPr/>
-                        <a:t>90.9 %</a:t>
-                      </a:r>
-                    </a:p>
-                  </a:txBody>
-                </a:tc>
-                <a:tc>
-                  <a:txBody>
-                    <a:bodyPr/>
-                    <a:lstStyle/>
-                    <a:p>
-                      <a:pPr lvl="0" indent="0" marL="0">
-                        <a:buNone/>
-                      </a:pPr>
-                      <a:r>
-                        <a:rPr b="1"/>
-                        <a:t>94.5 %</a:t>
-                      </a:r>
-                    </a:p>
-                  </a:txBody>
-                </a:tc>
-              </a:tr>
-              <a:tr h="0">
-                <a:tc>
-                  <a:txBody>
-                    <a:bodyPr/>
-                    <a:lstStyle/>
-                    <a:p>
-                      <a:pPr lvl="0" indent="0" marL="0">
-                        <a:buNone/>
-                      </a:pPr>
-                      <a:r>
-                        <a:rPr/>
-                        <a:t>adult / child</a:t>
-                      </a:r>
-                    </a:p>
-                  </a:txBody>
-                </a:tc>
-                <a:tc>
-                  <a:txBody>
-                    <a:bodyPr/>
-                    <a:lstStyle/>
-                    <a:p>
-                      <a:pPr lvl="0" indent="0" marL="0">
-                        <a:buNone/>
-                      </a:pPr>
-                      <a:r>
-                        <a:rPr/>
-                        <a:t>96.4 %</a:t>
-                      </a:r>
-                    </a:p>
-                  </a:txBody>
-                </a:tc>
-                <a:tc>
-                  <a:txBody>
-                    <a:bodyPr/>
-                    <a:lstStyle/>
-                    <a:p>
-                      <a:pPr lvl="0" indent="0" marL="0">
-                        <a:buNone/>
-                      </a:pPr>
-                      <a:r>
-                        <a:rPr b="1"/>
-                        <a:t>100 %</a:t>
-                      </a:r>
-                    </a:p>
-                  </a:txBody>
-                </a:tc>
-              </a:tr>
-            </a:tbl>
-          </a:graphicData>
-        </a:graphic>
-      </p:graphicFrame>
+      </p:pic>
     </p:spTree>
   </p:cSld>
 </p:sld>
@@ -4898,233 +5789,51 @@
       </p:grpSpPr>
       <p:sp>
         <p:nvSpPr>
-          <p:cNvPr id="2" name="Title 1"/>
-          <p:cNvSpPr>
-            <a:spLocks noGrp="1"/>
-          </p:cNvSpPr>
-          <p:nvPr>
-            <p:ph type="title"/>
-          </p:nvPr>
-        </p:nvSpPr>
-        <p:spPr>
-          <a:xfrm>
-            <a:off x="457201" y="204787"/>
-            <a:ext cx="3008313" cy="871538"/>
-          </a:xfrm>
-        </p:spPr>
-        <p:txBody>
-          <a:bodyPr/>
-          <a:lstStyle/>
+          <p:cNvPr id="3" name="Content Placeholder 2"/>
+          <p:cNvSpPr>
+            <a:spLocks noGrp="1"/>
+          </p:cNvSpPr>
+          <p:nvPr>
+            <p:ph idx="1"/>
+          </p:nvPr>
+        </p:nvSpPr>
+        <p:spPr/>
+        <p:txBody>
+          <a:bodyPr/>
+          <a:lstStyle/>
+          <a:p>
+            <a:pPr lvl="0"/>
+            <a:r>
+              <a:rPr b="1"/>
+              <a:t>Visitors today</a:t>
+            </a:r>
+            <a:r>
+              <a:rPr/>
+              <a:t> counts entries only and never falls</a:t>
+            </a:r>
+          </a:p>
+          <a:p>
+            <a:pPr lvl="0"/>
+            <a:r>
+              <a:rPr b="1"/>
+              <a:t>Current occupancy</a:t>
+            </a:r>
+            <a:r>
+              <a:rPr/>
+              <a:t> is net, and falls again when people leave</a:t>
+            </a:r>
+          </a:p>
           <a:p>
             <a:pPr lvl="0" indent="0" marL="0">
               <a:buNone/>
             </a:pPr>
             <a:r>
               <a:rPr/>
-              <a:t>Counting areas have a role</a:t>
-            </a:r>
-          </a:p>
-        </p:txBody>
-      </p:sp>
-      <p:sp>
-        <p:nvSpPr>
-          <p:cNvPr id="4" name="Text Placeholder 3"/>
-          <p:cNvSpPr>
-            <a:spLocks noGrp="1"/>
-          </p:cNvSpPr>
-          <p:nvPr>
-            <p:ph idx="2" sz="half" type="body"/>
-          </p:nvPr>
-        </p:nvSpPr>
-        <p:spPr/>
-        <p:txBody>
-          <a:bodyPr/>
-          <a:lstStyle/>
-          <a:p>
-            <a:pPr lvl="0" indent="0" marL="0">
-              <a:buNone/>
-            </a:pPr>
-            <a:r>
-              <a:rPr/>
-              <a:t>Restricting what is </a:t>
-            </a:r>
-            <a:r>
-              <a:rPr b="1"/>
-              <a:t>tracked</a:t>
-            </a:r>
-            <a:r>
-              <a:rPr/>
-              <a:t> and what is </a:t>
-            </a:r>
-            <a:r>
-              <a:rPr b="1"/>
-              <a:t>classified</a:t>
-            </a:r>
-            <a:r>
-              <a:rPr/>
-              <a:t> are different needs.</a:t>
-            </a:r>
-          </a:p>
-        </p:txBody>
-      </p:sp>
-      <p:graphicFrame>
-        <p:nvGraphicFramePr>
-          <p:cNvPr id="6" name="Content Placeholder 5"/>
-          <p:cNvGraphicFramePr>
-            <a:graphicFrameLocks noGrp="1"/>
-          </p:cNvGraphicFramePr>
-          <p:nvPr>
-            <p:ph idx="1"/>
-          </p:nvPr>
-        </p:nvGraphicFramePr>
-        <p:xfrm>
-          <a:off x="3568700" y="203200"/>
-          <a:ext cx="5105400" cy="4381500"/>
-        </p:xfrm>
-        <a:graphic>
-          <a:graphicData uri="http://schemas.openxmlformats.org/drawingml/2006/table">
-            <a:tbl>
-              <a:tblPr firstRow="1" bandRow="1">
-                <a:tableStyleId>{5C22544A-7EE6-4342-B048-85BDC9FD1C3A}</a:tableStyleId>
-              </a:tblPr>
-              <a:tblGrid>
-                <a:gridCol w="2552700"/>
-                <a:gridCol w="2552700"/>
-              </a:tblGrid>
-              <a:tr h="0">
-                <a:tc>
-                  <a:txBody>
-                    <a:bodyPr/>
-                    <a:lstStyle/>
-                    <a:p>
-                      <a:pPr lvl="0" indent="0" marL="0">
-                        <a:buNone/>
-                      </a:pPr>
-                      <a:r>
-                        <a:rPr/>
-                        <a:t>role</a:t>
-                      </a:r>
-                    </a:p>
-                  </a:txBody>
-                  <a:tcPr/>
-                </a:tc>
-                <a:tc>
-                  <a:txBody>
-                    <a:bodyPr/>
-                    <a:lstStyle/>
-                    <a:p>
-                      <a:pPr lvl="0" indent="0" marL="0">
-                        <a:buNone/>
-                      </a:pPr>
-                      <a:r>
-                        <a:rPr/>
-                        <a:t>effect</a:t>
-                      </a:r>
-                    </a:p>
-                  </a:txBody>
-                  <a:tcPr/>
-                </a:tc>
-              </a:tr>
-              <a:tr h="0">
-                <a:tc>
-                  <a:txBody>
-                    <a:bodyPr/>
-                    <a:lstStyle/>
-                    <a:p>
-                      <a:pPr lvl="0" indent="0" marL="0">
-                        <a:buNone/>
-                      </a:pPr>
-                      <a:r>
-                        <a:rPr/>
-                        <a:t>count only inside</a:t>
-                      </a:r>
-                    </a:p>
-                  </a:txBody>
-                </a:tc>
-                <a:tc>
-                  <a:txBody>
-                    <a:bodyPr/>
-                    <a:lstStyle/>
-                    <a:p>
-                      <a:pPr lvl="0" indent="0" marL="0">
-                        <a:buNone/>
-                      </a:pPr>
-                      <a:r>
-                        <a:rPr/>
-                        <a:t>only people inside are tracked at all</a:t>
-                      </a:r>
-                    </a:p>
-                  </a:txBody>
-                </a:tc>
-              </a:tr>
-              <a:tr h="0">
-                <a:tc>
-                  <a:txBody>
-                    <a:bodyPr/>
-                    <a:lstStyle/>
-                    <a:p>
-                      <a:pPr lvl="0" indent="0" marL="0">
-                        <a:buNone/>
-                      </a:pPr>
-                      <a:r>
-                        <a:rPr/>
-                        <a:t>ignore inside</a:t>
-                      </a:r>
-                    </a:p>
-                  </a:txBody>
-                </a:tc>
-                <a:tc>
-                  <a:txBody>
-                    <a:bodyPr/>
-                    <a:lstStyle/>
-                    <a:p>
-                      <a:pPr lvl="0" indent="0" marL="0">
-                        <a:buNone/>
-                      </a:pPr>
-                      <a:r>
-                        <a:rPr/>
-                        <a:t>people inside are skipped: a window, a mirror, a poster</a:t>
-                      </a:r>
-                    </a:p>
-                  </a:txBody>
-                </a:tc>
-              </a:tr>
-              <a:tr h="0">
-                <a:tc>
-                  <a:txBody>
-                    <a:bodyPr/>
-                    <a:lstStyle/>
-                    <a:p>
-                      <a:pPr lvl="0" indent="0" marL="0">
-                        <a:buNone/>
-                      </a:pPr>
-                      <a:r>
-                        <a:rPr/>
-                        <a:t>classify only inside</a:t>
-                      </a:r>
-                    </a:p>
-                  </a:txBody>
-                </a:tc>
-                <a:tc>
-                  <a:txBody>
-                    <a:bodyPr/>
-                    <a:lstStyle/>
-                    <a:p>
-                      <a:pPr lvl="0" indent="0" marL="0">
-                        <a:buNone/>
-                      </a:pPr>
-                      <a:r>
-                        <a:rPr/>
-                        <a:t>everyone counted, only those inside sexed and aged</a:t>
-                      </a:r>
-                    </a:p>
-                  </a:txBody>
-                </a:tc>
-              </a:tr>
-            </a:tbl>
-          </a:graphicData>
-        </a:graphic>
-      </p:graphicFrame>
+              <a:t>Someone who walks in and out has still visited. Conflating the two is the most common way a footfall dashboard misleads.</a:t>
+            </a:r>
+          </a:p>
+        </p:txBody>
+      </p:sp>
     </p:spTree>
   </p:cSld>
 </p:sld>
@@ -5149,12 +5858,12 @@
       </p:grpSpPr>
       <p:sp>
         <p:nvSpPr>
-          <p:cNvPr id="3" name="Content Placeholder 2"/>
-          <p:cNvSpPr>
-            <a:spLocks noGrp="1"/>
-          </p:cNvSpPr>
-          <p:nvPr>
-            <p:ph idx="1"/>
+          <p:cNvPr id="2" name="Title 1"/>
+          <p:cNvSpPr>
+            <a:spLocks noGrp="1"/>
+          </p:cNvSpPr>
+          <p:nvPr>
+            <p:ph type="title"/>
           </p:nvPr>
         </p:nvSpPr>
         <p:spPr/>
@@ -5167,11 +5876,41 @@
             </a:pPr>
             <a:r>
               <a:rPr/>
-              <a:t>Only the first constrains where the line may go — and the console says so when it is violated.</a:t>
-            </a:r>
-          </a:p>
-        </p:txBody>
-      </p:sp>
+              <a:t>How it works</a:t>
+            </a:r>
+          </a:p>
+        </p:txBody>
+      </p:sp>
+      <p:pic>
+        <p:nvPicPr>
+          <p:cNvPr descr="figures/fig_pipeline.png" id="0" name="Picture 1"/>
+          <p:cNvPicPr>
+            <a:picLocks noGrp="1" noChangeAspect="1"/>
+          </p:cNvPicPr>
+          <p:nvPr/>
+        </p:nvPicPr>
+        <p:blipFill>
+          <a:blip r:embed="rId2"/>
+          <a:stretch>
+            <a:fillRect/>
+          </a:stretch>
+        </p:blipFill>
+        <p:spPr bwMode="auto">
+          <a:xfrm>
+            <a:off x="457200" y="1447800"/>
+            <a:ext cx="8229600" cy="2882900"/>
+          </a:xfrm>
+          <a:prstGeom prst="rect">
+            <a:avLst/>
+          </a:prstGeom>
+          <a:noFill/>
+          <a:ln w="9525">
+            <a:noFill/>
+            <a:headEnd/>
+            <a:tailEnd/>
+          </a:ln>
+        </p:spPr>
+      </p:pic>
     </p:spTree>
   </p:cSld>
 </p:sld>
@@ -5214,78 +5953,41 @@
             </a:pPr>
             <a:r>
               <a:rPr/>
-              <a:t>An area reports its own population</a:t>
-            </a:r>
-          </a:p>
-        </p:txBody>
-      </p:sp>
-      <p:sp>
-        <p:nvSpPr>
-          <p:cNvPr id="3" name="Content Placeholder 2"/>
-          <p:cNvSpPr>
-            <a:spLocks noGrp="1"/>
-          </p:cNvSpPr>
-          <p:nvPr>
-            <p:ph idx="1"/>
-          </p:nvPr>
-        </p:nvSpPr>
-        <p:spPr/>
-        <p:txBody>
-          <a:bodyPr/>
-          <a:lstStyle/>
-          <a:p>
-            <a:pPr lvl="0" indent="0" marL="0">
-              <a:buNone/>
-            </a:pPr>
-            <a:r>
-              <a:rPr/>
-              <a:t>Who is standing in it </a:t>
-            </a:r>
-            <a:r>
-              <a:rPr b="1"/>
-              <a:t>right now</a:t>
-            </a:r>
-            <a:r>
-              <a:rPr/>
-              <a:t>, split male/female and adult/child.</a:t>
-            </a:r>
-          </a:p>
-          <a:p>
-            <a:pPr lvl="0"/>
-            <a:r>
-              <a:rPr/>
-              <a:t>Owes nothing to the trigger line</a:t>
-            </a:r>
-          </a:p>
-          <a:p>
-            <a:pPr lvl="0"/>
-            <a:r>
-              <a:rPr/>
-              <a:t>Reads correctly from the first frame rather than starting at zero</a:t>
-            </a:r>
-          </a:p>
-          <a:p>
-            <a:pPr lvl="0"/>
-            <a:r>
-              <a:rPr/>
-              <a:t>Undecided people are reported as unknown, so the parts always sum to the total</a:t>
-            </a:r>
-          </a:p>
-          <a:p>
-            <a:pPr lvl="0" indent="0" marL="0">
-              <a:buNone/>
-            </a:pPr>
-            <a:r>
-              <a:rPr i="1"/>
-              <a:t>Classify only inside</a:t>
-            </a:r>
-            <a:r>
-              <a:rPr/>
-              <a:t> is the accuracy lever on a wide scene: spend the crop budget where people are large and clear.</a:t>
-            </a:r>
-          </a:p>
-        </p:txBody>
-      </p:sp>
+              <a:t>A trigger line, and what it really covers</a:t>
+            </a:r>
+          </a:p>
+        </p:txBody>
+      </p:sp>
+      <p:pic>
+        <p:nvPicPr>
+          <p:cNvPr descr="figures/05_trigger_line.jpg" id="0" name="Picture 1"/>
+          <p:cNvPicPr>
+            <a:picLocks noGrp="1" noChangeAspect="1"/>
+          </p:cNvPicPr>
+          <p:nvPr/>
+        </p:nvPicPr>
+        <p:blipFill>
+          <a:blip r:embed="rId2"/>
+          <a:stretch>
+            <a:fillRect/>
+          </a:stretch>
+        </p:blipFill>
+        <p:spPr bwMode="auto">
+          <a:xfrm>
+            <a:off x="1511300" y="1193800"/>
+            <a:ext cx="6108700" cy="3390900"/>
+          </a:xfrm>
+          <a:prstGeom prst="rect">
+            <a:avLst/>
+          </a:prstGeom>
+          <a:noFill/>
+          <a:ln w="9525">
+            <a:noFill/>
+            <a:headEnd/>
+            <a:tailEnd/>
+          </a:ln>
+        </p:spPr>
+      </p:pic>
     </p:spTree>
   </p:cSld>
 </p:sld>
